--- a/Restwise-NCSC.pptx
+++ b/Restwise-NCSC.pptx
@@ -2149,7 +2149,7 @@
       </p:grpSpPr>
       <p:pic>
         <p:nvPicPr>
-          <p:cNvPr id="2" name="Image 0" descr="D:\NCSC-HealthTracker\static\img\favicon-512.png"/>
+          <p:cNvPr id="2" name="!!logo" descr="D:\NCSC-HealthTracker\static\img\favicon-512.png"/>
           <p:cNvPicPr>
             <a:picLocks noChangeAspect="1"/>
           </p:cNvPicPr>
@@ -2277,6 +2277,13 @@
             <a:prstDash val="solid"/>
           </a:ln>
         </p:spPr>
+        <p:txBody>
+          <a:bodyPr/>
+          <a:lstStyle/>
+          <a:p>
+            <a:endParaRPr lang="en-IN"/>
+          </a:p>
+        </p:txBody>
       </p:sp>
       <p:sp>
         <p:nvSpPr>
@@ -2345,6 +2352,13 @@
             <a:prstDash val="solid"/>
           </a:ln>
         </p:spPr>
+        <p:txBody>
+          <a:bodyPr/>
+          <a:lstStyle/>
+          <a:p>
+            <a:endParaRPr lang="en-IN"/>
+          </a:p>
+        </p:txBody>
       </p:sp>
       <p:sp>
         <p:nvSpPr>
@@ -2413,6 +2427,13 @@
             <a:prstDash val="solid"/>
           </a:ln>
         </p:spPr>
+        <p:txBody>
+          <a:bodyPr/>
+          <a:lstStyle/>
+          <a:p>
+            <a:endParaRPr lang="en-IN"/>
+          </a:p>
+        </p:txBody>
       </p:sp>
       <p:sp>
         <p:nvSpPr>
@@ -2497,9 +2518,26 @@
   <p:clrMapOvr>
     <a:masterClrMapping/>
   </p:clrMapOvr>
-  <p:transition spd="slow">
-    <p:fade/>
-  </p:transition>
+  <mc:AlternateContent xmlns:mc="http://schemas.openxmlformats.org/markup-compatibility/2006" xmlns:p14="http://schemas.microsoft.com/office/powerpoint/2010/main">
+    <mc:Choice Requires="p14">
+      <p:transition spd="slow" p14:dur="1200">
+        <p:extLst>
+          <p:ext uri="{EAC30AE4-FB1A-49FA-B60E-2F6A631AC59A}">
+            <p14:morph xmlns="" p14:option="byObject"/>
+          </p:ext>
+        </p:extLst>
+      </p:transition>
+    </mc:Choice>
+    <mc:Fallback xmlns="">
+      <p:transition spd="slow">
+        <p:extLst>
+          <p:ext uri="{EAC30AE4-FB1A-49FA-B60E-2F6A631AC59A}">
+            <p14:morph xmlns:p14="http://schemas.microsoft.com/office/powerpoint/2010/main" xmlns="" p14:option="byObject"/>
+          </p:ext>
+        </p:extLst>
+      </p:transition>
+    </mc:Fallback>
+  </mc:AlternateContent>
   <p:timing>
     <p:tnLst>
       <p:par>
@@ -2524,7 +2562,7 @@
                             </p:stCondLst>
                             <p:childTnLst>
                               <p:par>
-                                <p:cTn id="5" presetID="10" presetClass="entr" presetSubtype="0" fill="hold" nodeType="withEffect">
+                                <p:cTn id="5" presetID="10" presetClass="entr" presetSubtype="0" fill="hold" grpId="0" nodeType="withEffect">
                                   <p:stCondLst>
                                     <p:cond delay="0"/>
                                   </p:stCondLst>
@@ -2537,7 +2575,7 @@
                                           </p:stCondLst>
                                         </p:cTn>
                                         <p:tgtEl>
-                                          <p:spTgt spid="2"/>
+                                          <p:spTgt spid="3"/>
                                         </p:tgtEl>
                                         <p:attrNameLst>
                                           <p:attrName>style.visibility</p:attrName>
@@ -2551,7 +2589,7 @@
                                       <p:cBhvr>
                                         <p:cTn id="7" dur="350"/>
                                         <p:tgtEl>
-                                          <p:spTgt spid="2"/>
+                                          <p:spTgt spid="3"/>
                                         </p:tgtEl>
                                       </p:cBhvr>
                                     </p:animEffect>
@@ -2561,7 +2599,7 @@
                               <p:par>
                                 <p:cTn id="8" presetID="10" presetClass="entr" presetSubtype="0" fill="hold" grpId="0" nodeType="withEffect">
                                   <p:stCondLst>
-                                    <p:cond delay="100"/>
+                                    <p:cond delay="120"/>
                                   </p:stCondLst>
                                   <p:childTnLst>
                                     <p:set>
@@ -2572,7 +2610,7 @@
                                           </p:stCondLst>
                                         </p:cTn>
                                         <p:tgtEl>
-                                          <p:spTgt spid="3"/>
+                                          <p:spTgt spid="4"/>
                                         </p:tgtEl>
                                         <p:attrNameLst>
                                           <p:attrName>style.visibility</p:attrName>
@@ -2586,7 +2624,7 @@
                                       <p:cBhvr>
                                         <p:cTn id="10" dur="350"/>
                                         <p:tgtEl>
-                                          <p:spTgt spid="3"/>
+                                          <p:spTgt spid="4"/>
                                         </p:tgtEl>
                                       </p:cBhvr>
                                     </p:animEffect>
@@ -2596,7 +2634,7 @@
                               <p:par>
                                 <p:cTn id="11" presetID="10" presetClass="entr" presetSubtype="0" fill="hold" grpId="0" nodeType="withEffect">
                                   <p:stCondLst>
-                                    <p:cond delay="200"/>
+                                    <p:cond delay="240"/>
                                   </p:stCondLst>
                                   <p:childTnLst>
                                     <p:set>
@@ -2607,7 +2645,7 @@
                                           </p:stCondLst>
                                         </p:cTn>
                                         <p:tgtEl>
-                                          <p:spTgt spid="4"/>
+                                          <p:spTgt spid="5"/>
                                         </p:tgtEl>
                                         <p:attrNameLst>
                                           <p:attrName>style.visibility</p:attrName>
@@ -2621,17 +2659,17 @@
                                       <p:cBhvr>
                                         <p:cTn id="13" dur="350"/>
                                         <p:tgtEl>
-                                          <p:spTgt spid="4"/>
-                                        </p:tgtEl>
-                                      </p:cBhvr>
-                                    </p:animEffect>
-                                  </p:childTnLst>
-                                </p:cTn>
-                              </p:par>
-                              <p:par>
-                                <p:cTn id="14" presetID="10" presetClass="entr" presetSubtype="0" fill="hold" nodeType="withEffect">
-                                  <p:stCondLst>
-                                    <p:cond delay="300"/>
+                                          <p:spTgt spid="5"/>
+                                        </p:tgtEl>
+                                      </p:cBhvr>
+                                    </p:animEffect>
+                                  </p:childTnLst>
+                                </p:cTn>
+                              </p:par>
+                              <p:par>
+                                <p:cTn id="14" presetID="10" presetClass="entr" presetSubtype="0" fill="hold" grpId="0" nodeType="withEffect">
+                                  <p:stCondLst>
+                                    <p:cond delay="360"/>
                                   </p:stCondLst>
                                   <p:childTnLst>
                                     <p:set>
@@ -2642,7 +2680,7 @@
                                           </p:stCondLst>
                                         </p:cTn>
                                         <p:tgtEl>
-                                          <p:spTgt spid="5"/>
+                                          <p:spTgt spid="6"/>
                                         </p:tgtEl>
                                         <p:attrNameLst>
                                           <p:attrName>style.visibility</p:attrName>
@@ -2656,7 +2694,7 @@
                                       <p:cBhvr>
                                         <p:cTn id="16" dur="350"/>
                                         <p:tgtEl>
-                                          <p:spTgt spid="5"/>
+                                          <p:spTgt spid="6"/>
                                         </p:tgtEl>
                                       </p:cBhvr>
                                     </p:animEffect>
@@ -2666,7 +2704,7 @@
                               <p:par>
                                 <p:cTn id="17" presetID="10" presetClass="entr" presetSubtype="0" fill="hold" grpId="0" nodeType="withEffect">
                                   <p:stCondLst>
-                                    <p:cond delay="400"/>
+                                    <p:cond delay="480"/>
                                   </p:stCondLst>
                                   <p:childTnLst>
                                     <p:set>
@@ -2677,7 +2715,7 @@
                                           </p:stCondLst>
                                         </p:cTn>
                                         <p:tgtEl>
-                                          <p:spTgt spid="6"/>
+                                          <p:spTgt spid="7"/>
                                         </p:tgtEl>
                                         <p:attrNameLst>
                                           <p:attrName>style.visibility</p:attrName>
@@ -2691,17 +2729,17 @@
                                       <p:cBhvr>
                                         <p:cTn id="19" dur="350"/>
                                         <p:tgtEl>
-                                          <p:spTgt spid="6"/>
-                                        </p:tgtEl>
-                                      </p:cBhvr>
-                                    </p:animEffect>
-                                  </p:childTnLst>
-                                </p:cTn>
-                              </p:par>
-                              <p:par>
-                                <p:cTn id="20" presetID="10" presetClass="entr" presetSubtype="0" fill="hold" nodeType="withEffect">
-                                  <p:stCondLst>
-                                    <p:cond delay="500"/>
+                                          <p:spTgt spid="7"/>
+                                        </p:tgtEl>
+                                      </p:cBhvr>
+                                    </p:animEffect>
+                                  </p:childTnLst>
+                                </p:cTn>
+                              </p:par>
+                              <p:par>
+                                <p:cTn id="20" presetID="10" presetClass="entr" presetSubtype="0" fill="hold" grpId="0" nodeType="withEffect">
+                                  <p:stCondLst>
+                                    <p:cond delay="600"/>
                                   </p:stCondLst>
                                   <p:childTnLst>
                                     <p:set>
@@ -2712,7 +2750,7 @@
                                           </p:stCondLst>
                                         </p:cTn>
                                         <p:tgtEl>
-                                          <p:spTgt spid="7"/>
+                                          <p:spTgt spid="8"/>
                                         </p:tgtEl>
                                         <p:attrNameLst>
                                           <p:attrName>style.visibility</p:attrName>
@@ -2726,7 +2764,7 @@
                                       <p:cBhvr>
                                         <p:cTn id="22" dur="350"/>
                                         <p:tgtEl>
-                                          <p:spTgt spid="7"/>
+                                          <p:spTgt spid="8"/>
                                         </p:tgtEl>
                                       </p:cBhvr>
                                     </p:animEffect>
@@ -2736,7 +2774,7 @@
                               <p:par>
                                 <p:cTn id="23" presetID="10" presetClass="entr" presetSubtype="0" fill="hold" grpId="0" nodeType="withEffect">
                                   <p:stCondLst>
-                                    <p:cond delay="600"/>
+                                    <p:cond delay="720"/>
                                   </p:stCondLst>
                                   <p:childTnLst>
                                     <p:set>
@@ -2747,7 +2785,7 @@
                                           </p:stCondLst>
                                         </p:cTn>
                                         <p:tgtEl>
-                                          <p:spTgt spid="8"/>
+                                          <p:spTgt spid="9"/>
                                         </p:tgtEl>
                                         <p:attrNameLst>
                                           <p:attrName>style.visibility</p:attrName>
@@ -2761,17 +2799,17 @@
                                       <p:cBhvr>
                                         <p:cTn id="25" dur="350"/>
                                         <p:tgtEl>
-                                          <p:spTgt spid="8"/>
-                                        </p:tgtEl>
-                                      </p:cBhvr>
-                                    </p:animEffect>
-                                  </p:childTnLst>
-                                </p:cTn>
-                              </p:par>
-                              <p:par>
-                                <p:cTn id="26" presetID="10" presetClass="entr" presetSubtype="0" fill="hold" nodeType="withEffect">
-                                  <p:stCondLst>
-                                    <p:cond delay="700"/>
+                                          <p:spTgt spid="9"/>
+                                        </p:tgtEl>
+                                      </p:cBhvr>
+                                    </p:animEffect>
+                                  </p:childTnLst>
+                                </p:cTn>
+                              </p:par>
+                              <p:par>
+                                <p:cTn id="26" presetID="10" presetClass="entr" presetSubtype="0" fill="hold" grpId="0" nodeType="withEffect">
+                                  <p:stCondLst>
+                                    <p:cond delay="840"/>
                                   </p:stCondLst>
                                   <p:childTnLst>
                                     <p:set>
@@ -2782,7 +2820,7 @@
                                           </p:stCondLst>
                                         </p:cTn>
                                         <p:tgtEl>
-                                          <p:spTgt spid="9"/>
+                                          <p:spTgt spid="10"/>
                                         </p:tgtEl>
                                         <p:attrNameLst>
                                           <p:attrName>style.visibility</p:attrName>
@@ -2796,7 +2834,7 @@
                                       <p:cBhvr>
                                         <p:cTn id="28" dur="350"/>
                                         <p:tgtEl>
-                                          <p:spTgt spid="9"/>
+                                          <p:spTgt spid="10"/>
                                         </p:tgtEl>
                                       </p:cBhvr>
                                     </p:animEffect>
@@ -2806,7 +2844,7 @@
                               <p:par>
                                 <p:cTn id="29" presetID="10" presetClass="entr" presetSubtype="0" fill="hold" grpId="0" nodeType="withEffect">
                                   <p:stCondLst>
-                                    <p:cond delay="800"/>
+                                    <p:cond delay="960"/>
                                   </p:stCondLst>
                                   <p:childTnLst>
                                     <p:set>
@@ -2817,7 +2855,7 @@
                                           </p:stCondLst>
                                         </p:cTn>
                                         <p:tgtEl>
-                                          <p:spTgt spid="10"/>
+                                          <p:spTgt spid="11"/>
                                         </p:tgtEl>
                                         <p:attrNameLst>
                                           <p:attrName>style.visibility</p:attrName>
@@ -2830,41 +2868,6 @@
                                     <p:animEffect transition="in" filter="fade">
                                       <p:cBhvr>
                                         <p:cTn id="31" dur="350"/>
-                                        <p:tgtEl>
-                                          <p:spTgt spid="10"/>
-                                        </p:tgtEl>
-                                      </p:cBhvr>
-                                    </p:animEffect>
-                                  </p:childTnLst>
-                                </p:cTn>
-                              </p:par>
-                              <p:par>
-                                <p:cTn id="32" presetID="10" presetClass="entr" presetSubtype="0" fill="hold" grpId="0" nodeType="withEffect">
-                                  <p:stCondLst>
-                                    <p:cond delay="900"/>
-                                  </p:stCondLst>
-                                  <p:childTnLst>
-                                    <p:set>
-                                      <p:cBhvr>
-                                        <p:cTn id="33" dur="1" fill="hold">
-                                          <p:stCondLst>
-                                            <p:cond delay="0"/>
-                                          </p:stCondLst>
-                                        </p:cTn>
-                                        <p:tgtEl>
-                                          <p:spTgt spid="11"/>
-                                        </p:tgtEl>
-                                        <p:attrNameLst>
-                                          <p:attrName>style.visibility</p:attrName>
-                                        </p:attrNameLst>
-                                      </p:cBhvr>
-                                      <p:to>
-                                        <p:strVal val="visible"/>
-                                      </p:to>
-                                    </p:set>
-                                    <p:animEffect transition="in" filter="fade">
-                                      <p:cBhvr>
-                                        <p:cTn id="34" dur="350"/>
                                         <p:tgtEl>
                                           <p:spTgt spid="11"/>
                                         </p:tgtEl>
@@ -2903,8 +2906,11 @@
     <p:bldLst>
       <p:bldP spid="3" grpId="0" animBg="1"/>
       <p:bldP spid="4" grpId="0" animBg="1"/>
+      <p:bldP spid="5" grpId="0" animBg="1"/>
       <p:bldP spid="6" grpId="0" animBg="1"/>
+      <p:bldP spid="7" grpId="0" animBg="1"/>
       <p:bldP spid="8" grpId="0" animBg="1"/>
+      <p:bldP spid="9" grpId="0" animBg="1"/>
       <p:bldP spid="10" grpId="0" animBg="1"/>
       <p:bldP spid="11" grpId="0" animBg="1"/>
     </p:bldLst>
@@ -3054,6 +3060,13 @@
             </a:outerShdw>
           </a:effectLst>
         </p:spPr>
+        <p:txBody>
+          <a:bodyPr/>
+          <a:lstStyle/>
+          <a:p>
+            <a:endParaRPr lang="en-IN"/>
+          </a:p>
+        </p:txBody>
       </p:sp>
       <p:sp>
         <p:nvSpPr>
@@ -3120,6 +3133,13 @@
             <a:prstDash val="solid"/>
           </a:ln>
         </p:spPr>
+        <p:txBody>
+          <a:bodyPr/>
+          <a:lstStyle/>
+          <a:p>
+            <a:endParaRPr lang="en-IN"/>
+          </a:p>
+        </p:txBody>
       </p:sp>
       <p:pic>
         <p:nvPicPr>
@@ -3259,6 +3279,13 @@
             </a:outerShdw>
           </a:effectLst>
         </p:spPr>
+        <p:txBody>
+          <a:bodyPr/>
+          <a:lstStyle/>
+          <a:p>
+            <a:endParaRPr lang="en-IN"/>
+          </a:p>
+        </p:txBody>
       </p:sp>
       <p:sp>
         <p:nvSpPr>
@@ -3325,6 +3352,13 @@
             <a:prstDash val="solid"/>
           </a:ln>
         </p:spPr>
+        <p:txBody>
+          <a:bodyPr/>
+          <a:lstStyle/>
+          <a:p>
+            <a:endParaRPr lang="en-IN"/>
+          </a:p>
+        </p:txBody>
       </p:sp>
       <p:pic>
         <p:nvPicPr>
@@ -3464,6 +3498,13 @@
             </a:outerShdw>
           </a:effectLst>
         </p:spPr>
+        <p:txBody>
+          <a:bodyPr/>
+          <a:lstStyle/>
+          <a:p>
+            <a:endParaRPr lang="en-IN"/>
+          </a:p>
+        </p:txBody>
       </p:sp>
       <p:sp>
         <p:nvSpPr>
@@ -3530,6 +3571,13 @@
             <a:prstDash val="solid"/>
           </a:ln>
         </p:spPr>
+        <p:txBody>
+          <a:bodyPr/>
+          <a:lstStyle/>
+          <a:p>
+            <a:endParaRPr lang="en-IN"/>
+          </a:p>
+        </p:txBody>
       </p:sp>
       <p:pic>
         <p:nvPicPr>
@@ -3758,9 +3806,26 @@
   <p:clrMapOvr>
     <a:masterClrMapping/>
   </p:clrMapOvr>
-  <p:transition spd="slow">
-    <p:fade/>
-  </p:transition>
+  <mc:AlternateContent xmlns:mc="http://schemas.openxmlformats.org/markup-compatibility/2006" xmlns:p14="http://schemas.microsoft.com/office/powerpoint/2010/main">
+    <mc:Choice Requires="p14">
+      <p:transition spd="slow" p14:dur="1200">
+        <p:extLst>
+          <p:ext uri="{EAC30AE4-FB1A-49FA-B60E-2F6A631AC59A}">
+            <p14:morph xmlns="" p14:option="byObject"/>
+          </p:ext>
+        </p:extLst>
+      </p:transition>
+    </mc:Choice>
+    <mc:Fallback xmlns="">
+      <p:transition spd="slow">
+        <p:extLst>
+          <p:ext uri="{EAC30AE4-FB1A-49FA-B60E-2F6A631AC59A}">
+            <p14:morph xmlns:p14="http://schemas.microsoft.com/office/powerpoint/2010/main" xmlns="" p14:option="byObject"/>
+          </p:ext>
+        </p:extLst>
+      </p:transition>
+    </mc:Fallback>
+  </mc:AlternateContent>
   <p:timing>
     <p:tnLst>
       <p:par>
@@ -3822,7 +3887,7 @@
                               <p:par>
                                 <p:cTn id="8" presetID="10" presetClass="entr" presetSubtype="0" fill="hold" grpId="0" nodeType="withEffect">
                                   <p:stCondLst>
-                                    <p:cond delay="100"/>
+                                    <p:cond delay="120"/>
                                   </p:stCondLst>
                                   <p:childTnLst>
                                     <p:set>
@@ -3855,9 +3920,9 @@
                                 </p:cTn>
                               </p:par>
                               <p:par>
-                                <p:cTn id="11" presetID="10" presetClass="entr" presetSubtype="0" fill="hold" nodeType="withEffect">
-                                  <p:stCondLst>
-                                    <p:cond delay="200"/>
+                                <p:cTn id="11" presetID="10" presetClass="entr" presetSubtype="0" fill="hold" grpId="0" nodeType="withEffect">
+                                  <p:stCondLst>
+                                    <p:cond delay="240"/>
                                   </p:stCondLst>
                                   <p:childTnLst>
                                     <p:set>
@@ -3892,7 +3957,7 @@
                               <p:par>
                                 <p:cTn id="14" presetID="10" presetClass="entr" presetSubtype="0" fill="hold" grpId="0" nodeType="withEffect">
                                   <p:stCondLst>
-                                    <p:cond delay="300"/>
+                                    <p:cond delay="360"/>
                                   </p:stCondLst>
                                   <p:childTnLst>
                                     <p:set>
@@ -3925,9 +3990,9 @@
                                 </p:cTn>
                               </p:par>
                               <p:par>
-                                <p:cTn id="17" presetID="10" presetClass="entr" presetSubtype="0" fill="hold" nodeType="withEffect">
-                                  <p:stCondLst>
-                                    <p:cond delay="400"/>
+                                <p:cTn id="17" presetID="10" presetClass="entr" presetSubtype="0" fill="hold" grpId="0" nodeType="withEffect">
+                                  <p:stCondLst>
+                                    <p:cond delay="480"/>
                                   </p:stCondLst>
                                   <p:childTnLst>
                                     <p:set>
@@ -3962,7 +4027,7 @@
                               <p:par>
                                 <p:cTn id="20" presetID="10" presetClass="entr" presetSubtype="0" fill="hold" nodeType="withEffect">
                                   <p:stCondLst>
-                                    <p:cond delay="500"/>
+                                    <p:cond delay="600"/>
                                   </p:stCondLst>
                                   <p:childTnLst>
                                     <p:set>
@@ -3997,7 +4062,7 @@
                               <p:par>
                                 <p:cTn id="23" presetID="10" presetClass="entr" presetSubtype="0" fill="hold" grpId="0" nodeType="withEffect">
                                   <p:stCondLst>
-                                    <p:cond delay="600"/>
+                                    <p:cond delay="720"/>
                                   </p:stCondLst>
                                   <p:childTnLst>
                                     <p:set>
@@ -4032,7 +4097,7 @@
                               <p:par>
                                 <p:cTn id="26" presetID="10" presetClass="entr" presetSubtype="0" fill="hold" grpId="0" nodeType="withEffect">
                                   <p:stCondLst>
-                                    <p:cond delay="700"/>
+                                    <p:cond delay="840"/>
                                   </p:stCondLst>
                                   <p:childTnLst>
                                     <p:set>
@@ -4065,9 +4130,9 @@
                                 </p:cTn>
                               </p:par>
                               <p:par>
-                                <p:cTn id="29" presetID="10" presetClass="entr" presetSubtype="0" fill="hold" nodeType="withEffect">
-                                  <p:stCondLst>
-                                    <p:cond delay="800"/>
+                                <p:cTn id="29" presetID="10" presetClass="entr" presetSubtype="0" fill="hold" grpId="0" nodeType="withEffect">
+                                  <p:stCondLst>
+                                    <p:cond delay="960"/>
                                   </p:stCondLst>
                                   <p:childTnLst>
                                     <p:set>
@@ -4102,7 +4167,7 @@
                               <p:par>
                                 <p:cTn id="32" presetID="10" presetClass="entr" presetSubtype="0" fill="hold" grpId="0" nodeType="withEffect">
                                   <p:stCondLst>
-                                    <p:cond delay="900"/>
+                                    <p:cond delay="1080"/>
                                   </p:stCondLst>
                                   <p:childTnLst>
                                     <p:set>
@@ -4135,9 +4200,9 @@
                                 </p:cTn>
                               </p:par>
                               <p:par>
-                                <p:cTn id="35" presetID="10" presetClass="entr" presetSubtype="0" fill="hold" nodeType="withEffect">
-                                  <p:stCondLst>
-                                    <p:cond delay="900"/>
+                                <p:cTn id="35" presetID="10" presetClass="entr" presetSubtype="0" fill="hold" grpId="0" nodeType="withEffect">
+                                  <p:stCondLst>
+                                    <p:cond delay="1080"/>
                                   </p:stCondLst>
                                   <p:childTnLst>
                                     <p:set>
@@ -4172,7 +4237,7 @@
                               <p:par>
                                 <p:cTn id="38" presetID="10" presetClass="entr" presetSubtype="0" fill="hold" nodeType="withEffect">
                                   <p:stCondLst>
-                                    <p:cond delay="900"/>
+                                    <p:cond delay="1080"/>
                                   </p:stCondLst>
                                   <p:childTnLst>
                                     <p:set>
@@ -4207,7 +4272,7 @@
                               <p:par>
                                 <p:cTn id="41" presetID="10" presetClass="entr" presetSubtype="0" fill="hold" grpId="0" nodeType="withEffect">
                                   <p:stCondLst>
-                                    <p:cond delay="900"/>
+                                    <p:cond delay="1080"/>
                                   </p:stCondLst>
                                   <p:childTnLst>
                                     <p:set>
@@ -4242,7 +4307,7 @@
                               <p:par>
                                 <p:cTn id="44" presetID="10" presetClass="entr" presetSubtype="0" fill="hold" grpId="0" nodeType="withEffect">
                                   <p:stCondLst>
-                                    <p:cond delay="900"/>
+                                    <p:cond delay="1080"/>
                                   </p:stCondLst>
                                   <p:childTnLst>
                                     <p:set>
@@ -4275,9 +4340,9 @@
                                 </p:cTn>
                               </p:par>
                               <p:par>
-                                <p:cTn id="47" presetID="10" presetClass="entr" presetSubtype="0" fill="hold" nodeType="withEffect">
-                                  <p:stCondLst>
-                                    <p:cond delay="900"/>
+                                <p:cTn id="47" presetID="10" presetClass="entr" presetSubtype="0" fill="hold" grpId="0" nodeType="withEffect">
+                                  <p:stCondLst>
+                                    <p:cond delay="1080"/>
                                   </p:stCondLst>
                                   <p:childTnLst>
                                     <p:set>
@@ -4312,7 +4377,7 @@
                               <p:par>
                                 <p:cTn id="50" presetID="10" presetClass="entr" presetSubtype="0" fill="hold" grpId="0" nodeType="withEffect">
                                   <p:stCondLst>
-                                    <p:cond delay="900"/>
+                                    <p:cond delay="1080"/>
                                   </p:stCondLst>
                                   <p:childTnLst>
                                     <p:set>
@@ -4345,9 +4410,9 @@
                                 </p:cTn>
                               </p:par>
                               <p:par>
-                                <p:cTn id="53" presetID="10" presetClass="entr" presetSubtype="0" fill="hold" nodeType="withEffect">
-                                  <p:stCondLst>
-                                    <p:cond delay="900"/>
+                                <p:cTn id="53" presetID="10" presetClass="entr" presetSubtype="0" fill="hold" grpId="0" nodeType="withEffect">
+                                  <p:stCondLst>
+                                    <p:cond delay="1080"/>
                                   </p:stCondLst>
                                   <p:childTnLst>
                                     <p:set>
@@ -4382,7 +4447,7 @@
                               <p:par>
                                 <p:cTn id="56" presetID="10" presetClass="entr" presetSubtype="0" fill="hold" nodeType="withEffect">
                                   <p:stCondLst>
-                                    <p:cond delay="900"/>
+                                    <p:cond delay="1080"/>
                                   </p:stCondLst>
                                   <p:childTnLst>
                                     <p:set>
@@ -4417,7 +4482,7 @@
                               <p:par>
                                 <p:cTn id="59" presetID="10" presetClass="entr" presetSubtype="0" fill="hold" grpId="0" nodeType="withEffect">
                                   <p:stCondLst>
-                                    <p:cond delay="900"/>
+                                    <p:cond delay="1080"/>
                                   </p:stCondLst>
                                   <p:childTnLst>
                                     <p:set>
@@ -4452,7 +4517,7 @@
                               <p:par>
                                 <p:cTn id="62" presetID="10" presetClass="entr" presetSubtype="0" fill="hold" grpId="0" nodeType="withEffect">
                                   <p:stCondLst>
-                                    <p:cond delay="900"/>
+                                    <p:cond delay="1080"/>
                                   </p:stCondLst>
                                   <p:childTnLst>
                                     <p:set>
@@ -4487,7 +4552,7 @@
                               <p:par>
                                 <p:cTn id="65" presetID="10" presetClass="entr" presetSubtype="0" fill="hold" grpId="0" nodeType="withEffect">
                                   <p:stCondLst>
-                                    <p:cond delay="900"/>
+                                    <p:cond delay="1080"/>
                                   </p:stCondLst>
                                   <p:childTnLst>
                                     <p:set>
@@ -4549,13 +4614,19 @@
     <p:bldLst>
       <p:bldP spid="2" grpId="0" animBg="1"/>
       <p:bldP spid="3" grpId="0" animBg="1"/>
+      <p:bldP spid="4" grpId="0" animBg="1"/>
       <p:bldP spid="5" grpId="0" animBg="1"/>
+      <p:bldP spid="6" grpId="0" animBg="1"/>
       <p:bldP spid="8" grpId="0" animBg="1"/>
       <p:bldP spid="9" grpId="0" animBg="1"/>
+      <p:bldP spid="10" grpId="0" animBg="1"/>
       <p:bldP spid="11" grpId="0" animBg="1"/>
+      <p:bldP spid="12" grpId="0" animBg="1"/>
       <p:bldP spid="14" grpId="0" animBg="1"/>
       <p:bldP spid="15" grpId="0" animBg="1"/>
+      <p:bldP spid="16" grpId="0" animBg="1"/>
       <p:bldP spid="17" grpId="0" animBg="1"/>
+      <p:bldP spid="18" grpId="0" animBg="1"/>
       <p:bldP spid="20" grpId="0" animBg="1"/>
       <p:bldP spid="21" grpId="0" animBg="1"/>
       <p:bldP spid="22" grpId="0" animBg="1"/>
@@ -4706,6 +4777,13 @@
             </a:outerShdw>
           </a:effectLst>
         </p:spPr>
+        <p:txBody>
+          <a:bodyPr/>
+          <a:lstStyle/>
+          <a:p>
+            <a:endParaRPr lang="en-IN"/>
+          </a:p>
+        </p:txBody>
       </p:sp>
       <p:sp>
         <p:nvSpPr>
@@ -4733,6 +4811,13 @@
             <a:prstDash val="solid"/>
           </a:ln>
         </p:spPr>
+        <p:txBody>
+          <a:bodyPr/>
+          <a:lstStyle/>
+          <a:p>
+            <a:endParaRPr lang="en-IN"/>
+          </a:p>
+        </p:txBody>
       </p:sp>
       <p:pic>
         <p:nvPicPr>
@@ -4872,6 +4957,13 @@
             </a:outerShdw>
           </a:effectLst>
         </p:spPr>
+        <p:txBody>
+          <a:bodyPr/>
+          <a:lstStyle/>
+          <a:p>
+            <a:endParaRPr lang="en-IN"/>
+          </a:p>
+        </p:txBody>
       </p:sp>
       <p:sp>
         <p:nvSpPr>
@@ -4899,6 +4991,13 @@
             <a:prstDash val="solid"/>
           </a:ln>
         </p:spPr>
+        <p:txBody>
+          <a:bodyPr/>
+          <a:lstStyle/>
+          <a:p>
+            <a:endParaRPr lang="en-IN"/>
+          </a:p>
+        </p:txBody>
       </p:sp>
       <p:pic>
         <p:nvPicPr>
@@ -5038,6 +5137,13 @@
             </a:outerShdw>
           </a:effectLst>
         </p:spPr>
+        <p:txBody>
+          <a:bodyPr/>
+          <a:lstStyle/>
+          <a:p>
+            <a:endParaRPr lang="en-IN"/>
+          </a:p>
+        </p:txBody>
       </p:sp>
       <p:sp>
         <p:nvSpPr>
@@ -5065,6 +5171,13 @@
             <a:prstDash val="solid"/>
           </a:ln>
         </p:spPr>
+        <p:txBody>
+          <a:bodyPr/>
+          <a:lstStyle/>
+          <a:p>
+            <a:endParaRPr lang="en-IN"/>
+          </a:p>
+        </p:txBody>
       </p:sp>
       <p:pic>
         <p:nvPicPr>
@@ -5204,6 +5317,13 @@
             </a:outerShdw>
           </a:effectLst>
         </p:spPr>
+        <p:txBody>
+          <a:bodyPr/>
+          <a:lstStyle/>
+          <a:p>
+            <a:endParaRPr lang="en-IN"/>
+          </a:p>
+        </p:txBody>
       </p:sp>
       <p:sp>
         <p:nvSpPr>
@@ -5231,6 +5351,13 @@
             <a:prstDash val="solid"/>
           </a:ln>
         </p:spPr>
+        <p:txBody>
+          <a:bodyPr/>
+          <a:lstStyle/>
+          <a:p>
+            <a:endParaRPr lang="en-IN"/>
+          </a:p>
+        </p:txBody>
       </p:sp>
       <p:pic>
         <p:nvPicPr>
@@ -5459,9 +5586,26 @@
   <p:clrMapOvr>
     <a:masterClrMapping/>
   </p:clrMapOvr>
-  <p:transition spd="slow">
-    <p:fade/>
-  </p:transition>
+  <mc:AlternateContent xmlns:mc="http://schemas.openxmlformats.org/markup-compatibility/2006" xmlns:p14="http://schemas.microsoft.com/office/powerpoint/2010/main">
+    <mc:Choice Requires="p14">
+      <p:transition spd="slow" p14:dur="1200">
+        <p:extLst>
+          <p:ext uri="{EAC30AE4-FB1A-49FA-B60E-2F6A631AC59A}">
+            <p14:morph xmlns="" p14:option="byObject"/>
+          </p:ext>
+        </p:extLst>
+      </p:transition>
+    </mc:Choice>
+    <mc:Fallback xmlns="">
+      <p:transition spd="slow">
+        <p:extLst>
+          <p:ext uri="{EAC30AE4-FB1A-49FA-B60E-2F6A631AC59A}">
+            <p14:morph xmlns:p14="http://schemas.microsoft.com/office/powerpoint/2010/main" xmlns="" p14:option="byObject"/>
+          </p:ext>
+        </p:extLst>
+      </p:transition>
+    </mc:Fallback>
+  </mc:AlternateContent>
   <p:timing>
     <p:tnLst>
       <p:par>
@@ -5523,7 +5667,7 @@
                               <p:par>
                                 <p:cTn id="8" presetID="10" presetClass="entr" presetSubtype="0" fill="hold" grpId="0" nodeType="withEffect">
                                   <p:stCondLst>
-                                    <p:cond delay="100"/>
+                                    <p:cond delay="120"/>
                                   </p:stCondLst>
                                   <p:childTnLst>
                                     <p:set>
@@ -5556,9 +5700,9 @@
                                 </p:cTn>
                               </p:par>
                               <p:par>
-                                <p:cTn id="11" presetID="10" presetClass="entr" presetSubtype="0" fill="hold" nodeType="withEffect">
-                                  <p:stCondLst>
-                                    <p:cond delay="200"/>
+                                <p:cTn id="11" presetID="10" presetClass="entr" presetSubtype="0" fill="hold" grpId="0" nodeType="withEffect">
+                                  <p:stCondLst>
+                                    <p:cond delay="240"/>
                                   </p:stCondLst>
                                   <p:childTnLst>
                                     <p:set>
@@ -5591,9 +5735,9 @@
                                 </p:cTn>
                               </p:par>
                               <p:par>
-                                <p:cTn id="14" presetID="10" presetClass="entr" presetSubtype="0" fill="hold" nodeType="withEffect">
-                                  <p:stCondLst>
-                                    <p:cond delay="300"/>
+                                <p:cTn id="14" presetID="10" presetClass="entr" presetSubtype="0" fill="hold" grpId="0" nodeType="withEffect">
+                                  <p:stCondLst>
+                                    <p:cond delay="360"/>
                                   </p:stCondLst>
                                   <p:childTnLst>
                                     <p:set>
@@ -5628,7 +5772,7 @@
                               <p:par>
                                 <p:cTn id="17" presetID="10" presetClass="entr" presetSubtype="0" fill="hold" nodeType="withEffect">
                                   <p:stCondLst>
-                                    <p:cond delay="400"/>
+                                    <p:cond delay="480"/>
                                   </p:stCondLst>
                                   <p:childTnLst>
                                     <p:set>
@@ -5663,7 +5807,7 @@
                               <p:par>
                                 <p:cTn id="20" presetID="10" presetClass="entr" presetSubtype="0" fill="hold" grpId="0" nodeType="withEffect">
                                   <p:stCondLst>
-                                    <p:cond delay="500"/>
+                                    <p:cond delay="600"/>
                                   </p:stCondLst>
                                   <p:childTnLst>
                                     <p:set>
@@ -5698,7 +5842,7 @@
                               <p:par>
                                 <p:cTn id="23" presetID="10" presetClass="entr" presetSubtype="0" fill="hold" grpId="0" nodeType="withEffect">
                                   <p:stCondLst>
-                                    <p:cond delay="600"/>
+                                    <p:cond delay="720"/>
                                   </p:stCondLst>
                                   <p:childTnLst>
                                     <p:set>
@@ -5731,9 +5875,9 @@
                                 </p:cTn>
                               </p:par>
                               <p:par>
-                                <p:cTn id="26" presetID="10" presetClass="entr" presetSubtype="0" fill="hold" nodeType="withEffect">
-                                  <p:stCondLst>
-                                    <p:cond delay="700"/>
+                                <p:cTn id="26" presetID="10" presetClass="entr" presetSubtype="0" fill="hold" grpId="0" nodeType="withEffect">
+                                  <p:stCondLst>
+                                    <p:cond delay="840"/>
                                   </p:stCondLst>
                                   <p:childTnLst>
                                     <p:set>
@@ -5766,9 +5910,9 @@
                                 </p:cTn>
                               </p:par>
                               <p:par>
-                                <p:cTn id="29" presetID="10" presetClass="entr" presetSubtype="0" fill="hold" nodeType="withEffect">
-                                  <p:stCondLst>
-                                    <p:cond delay="800"/>
+                                <p:cTn id="29" presetID="10" presetClass="entr" presetSubtype="0" fill="hold" grpId="0" nodeType="withEffect">
+                                  <p:stCondLst>
+                                    <p:cond delay="960"/>
                                   </p:stCondLst>
                                   <p:childTnLst>
                                     <p:set>
@@ -5803,7 +5947,7 @@
                               <p:par>
                                 <p:cTn id="32" presetID="10" presetClass="entr" presetSubtype="0" fill="hold" nodeType="withEffect">
                                   <p:stCondLst>
-                                    <p:cond delay="900"/>
+                                    <p:cond delay="1080"/>
                                   </p:stCondLst>
                                   <p:childTnLst>
                                     <p:set>
@@ -5838,7 +5982,7 @@
                               <p:par>
                                 <p:cTn id="35" presetID="10" presetClass="entr" presetSubtype="0" fill="hold" grpId="0" nodeType="withEffect">
                                   <p:stCondLst>
-                                    <p:cond delay="900"/>
+                                    <p:cond delay="1080"/>
                                   </p:stCondLst>
                                   <p:childTnLst>
                                     <p:set>
@@ -5873,7 +6017,7 @@
                               <p:par>
                                 <p:cTn id="38" presetID="10" presetClass="entr" presetSubtype="0" fill="hold" grpId="0" nodeType="withEffect">
                                   <p:stCondLst>
-                                    <p:cond delay="900"/>
+                                    <p:cond delay="1080"/>
                                   </p:stCondLst>
                                   <p:childTnLst>
                                     <p:set>
@@ -5906,9 +6050,9 @@
                                 </p:cTn>
                               </p:par>
                               <p:par>
-                                <p:cTn id="41" presetID="10" presetClass="entr" presetSubtype="0" fill="hold" nodeType="withEffect">
-                                  <p:stCondLst>
-                                    <p:cond delay="900"/>
+                                <p:cTn id="41" presetID="10" presetClass="entr" presetSubtype="0" fill="hold" grpId="0" nodeType="withEffect">
+                                  <p:stCondLst>
+                                    <p:cond delay="1080"/>
                                   </p:stCondLst>
                                   <p:childTnLst>
                                     <p:set>
@@ -5941,9 +6085,9 @@
                                 </p:cTn>
                               </p:par>
                               <p:par>
-                                <p:cTn id="44" presetID="10" presetClass="entr" presetSubtype="0" fill="hold" nodeType="withEffect">
-                                  <p:stCondLst>
-                                    <p:cond delay="900"/>
+                                <p:cTn id="44" presetID="10" presetClass="entr" presetSubtype="0" fill="hold" grpId="0" nodeType="withEffect">
+                                  <p:stCondLst>
+                                    <p:cond delay="1080"/>
                                   </p:stCondLst>
                                   <p:childTnLst>
                                     <p:set>
@@ -5978,7 +6122,7 @@
                               <p:par>
                                 <p:cTn id="47" presetID="10" presetClass="entr" presetSubtype="0" fill="hold" nodeType="withEffect">
                                   <p:stCondLst>
-                                    <p:cond delay="900"/>
+                                    <p:cond delay="1080"/>
                                   </p:stCondLst>
                                   <p:childTnLst>
                                     <p:set>
@@ -6013,7 +6157,7 @@
                               <p:par>
                                 <p:cTn id="50" presetID="10" presetClass="entr" presetSubtype="0" fill="hold" grpId="0" nodeType="withEffect">
                                   <p:stCondLst>
-                                    <p:cond delay="900"/>
+                                    <p:cond delay="1080"/>
                                   </p:stCondLst>
                                   <p:childTnLst>
                                     <p:set>
@@ -6048,7 +6192,7 @@
                               <p:par>
                                 <p:cTn id="53" presetID="10" presetClass="entr" presetSubtype="0" fill="hold" grpId="0" nodeType="withEffect">
                                   <p:stCondLst>
-                                    <p:cond delay="900"/>
+                                    <p:cond delay="1080"/>
                                   </p:stCondLst>
                                   <p:childTnLst>
                                     <p:set>
@@ -6081,9 +6225,9 @@
                                 </p:cTn>
                               </p:par>
                               <p:par>
-                                <p:cTn id="56" presetID="10" presetClass="entr" presetSubtype="0" fill="hold" nodeType="withEffect">
-                                  <p:stCondLst>
-                                    <p:cond delay="900"/>
+                                <p:cTn id="56" presetID="10" presetClass="entr" presetSubtype="0" fill="hold" grpId="0" nodeType="withEffect">
+                                  <p:stCondLst>
+                                    <p:cond delay="1080"/>
                                   </p:stCondLst>
                                   <p:childTnLst>
                                     <p:set>
@@ -6116,9 +6260,9 @@
                                 </p:cTn>
                               </p:par>
                               <p:par>
-                                <p:cTn id="59" presetID="10" presetClass="entr" presetSubtype="0" fill="hold" nodeType="withEffect">
-                                  <p:stCondLst>
-                                    <p:cond delay="900"/>
+                                <p:cTn id="59" presetID="10" presetClass="entr" presetSubtype="0" fill="hold" grpId="0" nodeType="withEffect">
+                                  <p:stCondLst>
+                                    <p:cond delay="1080"/>
                                   </p:stCondLst>
                                   <p:childTnLst>
                                     <p:set>
@@ -6153,7 +6297,7 @@
                               <p:par>
                                 <p:cTn id="62" presetID="10" presetClass="entr" presetSubtype="0" fill="hold" nodeType="withEffect">
                                   <p:stCondLst>
-                                    <p:cond delay="900"/>
+                                    <p:cond delay="1080"/>
                                   </p:stCondLst>
                                   <p:childTnLst>
                                     <p:set>
@@ -6188,7 +6332,7 @@
                               <p:par>
                                 <p:cTn id="65" presetID="10" presetClass="entr" presetSubtype="0" fill="hold" grpId="0" nodeType="withEffect">
                                   <p:stCondLst>
-                                    <p:cond delay="900"/>
+                                    <p:cond delay="1080"/>
                                   </p:stCondLst>
                                   <p:childTnLst>
                                     <p:set>
@@ -6223,7 +6367,7 @@
                               <p:par>
                                 <p:cTn id="68" presetID="10" presetClass="entr" presetSubtype="0" fill="hold" grpId="0" nodeType="withEffect">
                                   <p:stCondLst>
-                                    <p:cond delay="900"/>
+                                    <p:cond delay="1080"/>
                                   </p:stCondLst>
                                   <p:childTnLst>
                                     <p:set>
@@ -6258,7 +6402,7 @@
                               <p:par>
                                 <p:cTn id="71" presetID="10" presetClass="entr" presetSubtype="0" fill="hold" grpId="0" nodeType="withEffect">
                                   <p:stCondLst>
-                                    <p:cond delay="900"/>
+                                    <p:cond delay="1080"/>
                                   </p:stCondLst>
                                   <p:childTnLst>
                                     <p:set>
@@ -6320,12 +6464,20 @@
     <p:bldLst>
       <p:bldP spid="2" grpId="0" animBg="1"/>
       <p:bldP spid="3" grpId="0" animBg="1"/>
+      <p:bldP spid="4" grpId="0" animBg="1"/>
+      <p:bldP spid="5" grpId="0" animBg="1"/>
       <p:bldP spid="7" grpId="0" animBg="1"/>
       <p:bldP spid="8" grpId="0" animBg="1"/>
+      <p:bldP spid="9" grpId="0" animBg="1"/>
+      <p:bldP spid="10" grpId="0" animBg="1"/>
       <p:bldP spid="12" grpId="0" animBg="1"/>
       <p:bldP spid="13" grpId="0" animBg="1"/>
+      <p:bldP spid="14" grpId="0" animBg="1"/>
+      <p:bldP spid="15" grpId="0" animBg="1"/>
       <p:bldP spid="17" grpId="0" animBg="1"/>
       <p:bldP spid="18" grpId="0" animBg="1"/>
+      <p:bldP spid="19" grpId="0" animBg="1"/>
+      <p:bldP spid="20" grpId="0" animBg="1"/>
       <p:bldP spid="22" grpId="0" animBg="1"/>
       <p:bldP spid="23" grpId="0" animBg="1"/>
       <p:bldP spid="24" grpId="0" animBg="1"/>
@@ -6583,6 +6735,13 @@
             </a:outerShdw>
           </a:effectLst>
         </p:spPr>
+        <p:txBody>
+          <a:bodyPr/>
+          <a:lstStyle/>
+          <a:p>
+            <a:endParaRPr lang="en-IN"/>
+          </a:p>
+        </p:txBody>
       </p:sp>
       <p:sp>
         <p:nvSpPr>
@@ -6610,6 +6769,13 @@
             <a:prstDash val="solid"/>
           </a:ln>
         </p:spPr>
+        <p:txBody>
+          <a:bodyPr/>
+          <a:lstStyle/>
+          <a:p>
+            <a:endParaRPr lang="en-IN"/>
+          </a:p>
+        </p:txBody>
       </p:sp>
       <p:pic>
         <p:nvPicPr>
@@ -6700,6 +6866,13 @@
             <a:prstDash val="solid"/>
           </a:ln>
         </p:spPr>
+        <p:txBody>
+          <a:bodyPr/>
+          <a:lstStyle/>
+          <a:p>
+            <a:endParaRPr lang="en-IN"/>
+          </a:p>
+        </p:txBody>
       </p:sp>
       <p:pic>
         <p:nvPicPr>
@@ -6790,6 +6963,13 @@
             <a:prstDash val="solid"/>
           </a:ln>
         </p:spPr>
+        <p:txBody>
+          <a:bodyPr/>
+          <a:lstStyle/>
+          <a:p>
+            <a:endParaRPr lang="en-IN"/>
+          </a:p>
+        </p:txBody>
       </p:sp>
       <p:pic>
         <p:nvPicPr>
@@ -6880,6 +7060,13 @@
             <a:prstDash val="solid"/>
           </a:ln>
         </p:spPr>
+        <p:txBody>
+          <a:bodyPr/>
+          <a:lstStyle/>
+          <a:p>
+            <a:endParaRPr lang="en-IN"/>
+          </a:p>
+        </p:txBody>
       </p:sp>
       <p:pic>
         <p:nvPicPr>
@@ -6970,6 +7157,13 @@
             <a:prstDash val="solid"/>
           </a:ln>
         </p:spPr>
+        <p:txBody>
+          <a:bodyPr/>
+          <a:lstStyle/>
+          <a:p>
+            <a:endParaRPr lang="en-IN"/>
+          </a:p>
+        </p:txBody>
       </p:sp>
       <p:pic>
         <p:nvPicPr>
@@ -7117,9 +7311,26 @@
   <p:clrMapOvr>
     <a:masterClrMapping/>
   </p:clrMapOvr>
-  <p:transition spd="slow">
-    <p:fade/>
-  </p:transition>
+  <mc:AlternateContent xmlns:mc="http://schemas.openxmlformats.org/markup-compatibility/2006" xmlns:p14="http://schemas.microsoft.com/office/powerpoint/2010/main">
+    <mc:Choice Requires="p14">
+      <p:transition spd="slow" p14:dur="1200">
+        <p:extLst>
+          <p:ext uri="{EAC30AE4-FB1A-49FA-B60E-2F6A631AC59A}">
+            <p14:morph xmlns="" p14:option="byObject"/>
+          </p:ext>
+        </p:extLst>
+      </p:transition>
+    </mc:Choice>
+    <mc:Fallback xmlns="">
+      <p:transition spd="slow">
+        <p:extLst>
+          <p:ext uri="{EAC30AE4-FB1A-49FA-B60E-2F6A631AC59A}">
+            <p14:morph xmlns:p14="http://schemas.microsoft.com/office/powerpoint/2010/main" xmlns="" p14:option="byObject"/>
+          </p:ext>
+        </p:extLst>
+      </p:transition>
+    </mc:Fallback>
+  </mc:AlternateContent>
   <p:timing>
     <p:tnLst>
       <p:par>
@@ -7181,7 +7392,7 @@
                               <p:par>
                                 <p:cTn id="8" presetID="10" presetClass="entr" presetSubtype="0" fill="hold" grpId="0" nodeType="withEffect">
                                   <p:stCondLst>
-                                    <p:cond delay="100"/>
+                                    <p:cond delay="120"/>
                                   </p:stCondLst>
                                   <p:childTnLst>
                                     <p:set>
@@ -7216,7 +7427,7 @@
                               <p:par>
                                 <p:cTn id="11" presetID="10" presetClass="entr" presetSubtype="0" fill="hold" grpId="0" nodeType="withEffect">
                                   <p:stCondLst>
-                                    <p:cond delay="200"/>
+                                    <p:cond delay="240"/>
                                   </p:stCondLst>
                                   <p:childTnLst>
                                     <p:set>
@@ -7251,7 +7462,7 @@
                               <p:par>
                                 <p:cTn id="14" presetID="10" presetClass="entr" presetSubtype="0" fill="hold" grpId="0" nodeType="withEffect">
                                   <p:stCondLst>
-                                    <p:cond delay="300"/>
+                                    <p:cond delay="360"/>
                                   </p:stCondLst>
                                   <p:childTnLst>
                                     <p:set>
@@ -7284,9 +7495,9 @@
                                 </p:cTn>
                               </p:par>
                               <p:par>
-                                <p:cTn id="17" presetID="10" presetClass="entr" presetSubtype="0" fill="hold" nodeType="withEffect">
-                                  <p:stCondLst>
-                                    <p:cond delay="400"/>
+                                <p:cTn id="17" presetID="10" presetClass="entr" presetSubtype="0" fill="hold" grpId="0" nodeType="withEffect">
+                                  <p:stCondLst>
+                                    <p:cond delay="480"/>
                                   </p:stCondLst>
                                   <p:childTnLst>
                                     <p:set>
@@ -7319,9 +7530,9 @@
                                 </p:cTn>
                               </p:par>
                               <p:par>
-                                <p:cTn id="20" presetID="10" presetClass="entr" presetSubtype="0" fill="hold" nodeType="withEffect">
-                                  <p:stCondLst>
-                                    <p:cond delay="500"/>
+                                <p:cTn id="20" presetID="10" presetClass="entr" presetSubtype="0" fill="hold" grpId="0" nodeType="withEffect">
+                                  <p:stCondLst>
+                                    <p:cond delay="600"/>
                                   </p:stCondLst>
                                   <p:childTnLst>
                                     <p:set>
@@ -7356,7 +7567,7 @@
                               <p:par>
                                 <p:cTn id="23" presetID="10" presetClass="entr" presetSubtype="0" fill="hold" nodeType="withEffect">
                                   <p:stCondLst>
-                                    <p:cond delay="600"/>
+                                    <p:cond delay="720"/>
                                   </p:stCondLst>
                                   <p:childTnLst>
                                     <p:set>
@@ -7391,7 +7602,7 @@
                               <p:par>
                                 <p:cTn id="26" presetID="10" presetClass="entr" presetSubtype="0" fill="hold" grpId="0" nodeType="withEffect">
                                   <p:stCondLst>
-                                    <p:cond delay="700"/>
+                                    <p:cond delay="840"/>
                                   </p:stCondLst>
                                   <p:childTnLst>
                                     <p:set>
@@ -7424,9 +7635,9 @@
                                 </p:cTn>
                               </p:par>
                               <p:par>
-                                <p:cTn id="29" presetID="10" presetClass="entr" presetSubtype="0" fill="hold" nodeType="withEffect">
-                                  <p:stCondLst>
-                                    <p:cond delay="800"/>
+                                <p:cTn id="29" presetID="10" presetClass="entr" presetSubtype="0" fill="hold" grpId="0" nodeType="withEffect">
+                                  <p:stCondLst>
+                                    <p:cond delay="960"/>
                                   </p:stCondLst>
                                   <p:childTnLst>
                                     <p:set>
@@ -7461,7 +7672,7 @@
                               <p:par>
                                 <p:cTn id="32" presetID="10" presetClass="entr" presetSubtype="0" fill="hold" nodeType="withEffect">
                                   <p:stCondLst>
-                                    <p:cond delay="900"/>
+                                    <p:cond delay="1080"/>
                                   </p:stCondLst>
                                   <p:childTnLst>
                                     <p:set>
@@ -7496,7 +7707,7 @@
                               <p:par>
                                 <p:cTn id="35" presetID="10" presetClass="entr" presetSubtype="0" fill="hold" grpId="0" nodeType="withEffect">
                                   <p:stCondLst>
-                                    <p:cond delay="900"/>
+                                    <p:cond delay="1080"/>
                                   </p:stCondLst>
                                   <p:childTnLst>
                                     <p:set>
@@ -7529,9 +7740,9 @@
                                 </p:cTn>
                               </p:par>
                               <p:par>
-                                <p:cTn id="38" presetID="10" presetClass="entr" presetSubtype="0" fill="hold" nodeType="withEffect">
-                                  <p:stCondLst>
-                                    <p:cond delay="900"/>
+                                <p:cTn id="38" presetID="10" presetClass="entr" presetSubtype="0" fill="hold" grpId="0" nodeType="withEffect">
+                                  <p:stCondLst>
+                                    <p:cond delay="1080"/>
                                   </p:stCondLst>
                                   <p:childTnLst>
                                     <p:set>
@@ -7566,7 +7777,7 @@
                               <p:par>
                                 <p:cTn id="41" presetID="10" presetClass="entr" presetSubtype="0" fill="hold" nodeType="withEffect">
                                   <p:stCondLst>
-                                    <p:cond delay="900"/>
+                                    <p:cond delay="1080"/>
                                   </p:stCondLst>
                                   <p:childTnLst>
                                     <p:set>
@@ -7601,7 +7812,7 @@
                               <p:par>
                                 <p:cTn id="44" presetID="10" presetClass="entr" presetSubtype="0" fill="hold" grpId="0" nodeType="withEffect">
                                   <p:stCondLst>
-                                    <p:cond delay="900"/>
+                                    <p:cond delay="1080"/>
                                   </p:stCondLst>
                                   <p:childTnLst>
                                     <p:set>
@@ -7634,9 +7845,9 @@
                                 </p:cTn>
                               </p:par>
                               <p:par>
-                                <p:cTn id="47" presetID="10" presetClass="entr" presetSubtype="0" fill="hold" nodeType="withEffect">
-                                  <p:stCondLst>
-                                    <p:cond delay="900"/>
+                                <p:cTn id="47" presetID="10" presetClass="entr" presetSubtype="0" fill="hold" grpId="0" nodeType="withEffect">
+                                  <p:stCondLst>
+                                    <p:cond delay="1080"/>
                                   </p:stCondLst>
                                   <p:childTnLst>
                                     <p:set>
@@ -7671,7 +7882,7 @@
                               <p:par>
                                 <p:cTn id="50" presetID="10" presetClass="entr" presetSubtype="0" fill="hold" nodeType="withEffect">
                                   <p:stCondLst>
-                                    <p:cond delay="900"/>
+                                    <p:cond delay="1080"/>
                                   </p:stCondLst>
                                   <p:childTnLst>
                                     <p:set>
@@ -7706,7 +7917,7 @@
                               <p:par>
                                 <p:cTn id="53" presetID="10" presetClass="entr" presetSubtype="0" fill="hold" grpId="0" nodeType="withEffect">
                                   <p:stCondLst>
-                                    <p:cond delay="900"/>
+                                    <p:cond delay="1080"/>
                                   </p:stCondLst>
                                   <p:childTnLst>
                                     <p:set>
@@ -7739,9 +7950,9 @@
                                 </p:cTn>
                               </p:par>
                               <p:par>
-                                <p:cTn id="56" presetID="10" presetClass="entr" presetSubtype="0" fill="hold" nodeType="withEffect">
-                                  <p:stCondLst>
-                                    <p:cond delay="900"/>
+                                <p:cTn id="56" presetID="10" presetClass="entr" presetSubtype="0" fill="hold" grpId="0" nodeType="withEffect">
+                                  <p:stCondLst>
+                                    <p:cond delay="1080"/>
                                   </p:stCondLst>
                                   <p:childTnLst>
                                     <p:set>
@@ -7776,7 +7987,7 @@
                               <p:par>
                                 <p:cTn id="59" presetID="10" presetClass="entr" presetSubtype="0" fill="hold" nodeType="withEffect">
                                   <p:stCondLst>
-                                    <p:cond delay="900"/>
+                                    <p:cond delay="1080"/>
                                   </p:stCondLst>
                                   <p:childTnLst>
                                     <p:set>
@@ -7811,7 +8022,7 @@
                               <p:par>
                                 <p:cTn id="62" presetID="10" presetClass="entr" presetSubtype="0" fill="hold" grpId="0" nodeType="withEffect">
                                   <p:stCondLst>
-                                    <p:cond delay="900"/>
+                                    <p:cond delay="1080"/>
                                   </p:stCondLst>
                                   <p:childTnLst>
                                     <p:set>
@@ -7875,10 +8086,16 @@
       <p:bldP spid="3" grpId="0" animBg="1"/>
       <p:bldP spid="4" grpId="0" animBg="1"/>
       <p:bldP spid="5" grpId="0" animBg="1"/>
+      <p:bldP spid="6" grpId="0" animBg="1"/>
+      <p:bldP spid="7" grpId="0" animBg="1"/>
       <p:bldP spid="9" grpId="0" animBg="1"/>
+      <p:bldP spid="10" grpId="0" animBg="1"/>
       <p:bldP spid="12" grpId="0" animBg="1"/>
+      <p:bldP spid="13" grpId="0" animBg="1"/>
       <p:bldP spid="15" grpId="0" animBg="1"/>
+      <p:bldP spid="16" grpId="0" animBg="1"/>
       <p:bldP spid="18" grpId="0" animBg="1"/>
+      <p:bldP spid="19" grpId="0" animBg="1"/>
       <p:bldP spid="21" grpId="0" animBg="1"/>
     </p:bldLst>
   </p:timing>
@@ -8050,6 +8267,13 @@
             </a:outerShdw>
           </a:effectLst>
         </p:spPr>
+        <p:txBody>
+          <a:bodyPr/>
+          <a:lstStyle/>
+          <a:p>
+            <a:endParaRPr lang="en-IN"/>
+          </a:p>
+        </p:txBody>
       </p:sp>
       <p:sp>
         <p:nvSpPr>
@@ -8077,6 +8301,13 @@
             <a:prstDash val="solid"/>
           </a:ln>
         </p:spPr>
+        <p:txBody>
+          <a:bodyPr/>
+          <a:lstStyle/>
+          <a:p>
+            <a:endParaRPr lang="en-IN"/>
+          </a:p>
+        </p:txBody>
       </p:sp>
       <p:pic>
         <p:nvPicPr>
@@ -8216,6 +8447,13 @@
             </a:outerShdw>
           </a:effectLst>
         </p:spPr>
+        <p:txBody>
+          <a:bodyPr/>
+          <a:lstStyle/>
+          <a:p>
+            <a:endParaRPr lang="en-IN"/>
+          </a:p>
+        </p:txBody>
       </p:sp>
       <p:sp>
         <p:nvSpPr>
@@ -8243,6 +8481,13 @@
             <a:prstDash val="solid"/>
           </a:ln>
         </p:spPr>
+        <p:txBody>
+          <a:bodyPr/>
+          <a:lstStyle/>
+          <a:p>
+            <a:endParaRPr lang="en-IN"/>
+          </a:p>
+        </p:txBody>
       </p:sp>
       <p:pic>
         <p:nvPicPr>
@@ -8382,6 +8627,13 @@
             </a:outerShdw>
           </a:effectLst>
         </p:spPr>
+        <p:txBody>
+          <a:bodyPr/>
+          <a:lstStyle/>
+          <a:p>
+            <a:endParaRPr lang="en-IN"/>
+          </a:p>
+        </p:txBody>
       </p:sp>
       <p:sp>
         <p:nvSpPr>
@@ -8409,6 +8661,13 @@
             <a:prstDash val="solid"/>
           </a:ln>
         </p:spPr>
+        <p:txBody>
+          <a:bodyPr/>
+          <a:lstStyle/>
+          <a:p>
+            <a:endParaRPr lang="en-IN"/>
+          </a:p>
+        </p:txBody>
       </p:sp>
       <p:pic>
         <p:nvPicPr>
@@ -8637,9 +8896,26 @@
   <p:clrMapOvr>
     <a:masterClrMapping/>
   </p:clrMapOvr>
-  <p:transition spd="slow">
-    <p:fade/>
-  </p:transition>
+  <mc:AlternateContent xmlns:mc="http://schemas.openxmlformats.org/markup-compatibility/2006" xmlns:p14="http://schemas.microsoft.com/office/powerpoint/2010/main">
+    <mc:Choice Requires="p14">
+      <p:transition spd="slow" p14:dur="1200">
+        <p:extLst>
+          <p:ext uri="{EAC30AE4-FB1A-49FA-B60E-2F6A631AC59A}">
+            <p14:morph xmlns="" p14:option="byObject"/>
+          </p:ext>
+        </p:extLst>
+      </p:transition>
+    </mc:Choice>
+    <mc:Fallback xmlns="">
+      <p:transition spd="slow">
+        <p:extLst>
+          <p:ext uri="{EAC30AE4-FB1A-49FA-B60E-2F6A631AC59A}">
+            <p14:morph xmlns:p14="http://schemas.microsoft.com/office/powerpoint/2010/main" xmlns="" p14:option="byObject"/>
+          </p:ext>
+        </p:extLst>
+      </p:transition>
+    </mc:Fallback>
+  </mc:AlternateContent>
   <p:timing>
     <p:tnLst>
       <p:par>
@@ -8701,7 +8977,7 @@
                               <p:par>
                                 <p:cTn id="8" presetID="10" presetClass="entr" presetSubtype="0" fill="hold" grpId="0" nodeType="withEffect">
                                   <p:stCondLst>
-                                    <p:cond delay="100"/>
+                                    <p:cond delay="120"/>
                                   </p:stCondLst>
                                   <p:childTnLst>
                                     <p:set>
@@ -8734,9 +9010,9 @@
                                 </p:cTn>
                               </p:par>
                               <p:par>
-                                <p:cTn id="11" presetID="10" presetClass="entr" presetSubtype="0" fill="hold" nodeType="withEffect">
-                                  <p:stCondLst>
-                                    <p:cond delay="200"/>
+                                <p:cTn id="11" presetID="10" presetClass="entr" presetSubtype="0" fill="hold" grpId="0" nodeType="withEffect">
+                                  <p:stCondLst>
+                                    <p:cond delay="240"/>
                                   </p:stCondLst>
                                   <p:childTnLst>
                                     <p:set>
@@ -8769,9 +9045,9 @@
                                 </p:cTn>
                               </p:par>
                               <p:par>
-                                <p:cTn id="14" presetID="10" presetClass="entr" presetSubtype="0" fill="hold" nodeType="withEffect">
-                                  <p:stCondLst>
-                                    <p:cond delay="300"/>
+                                <p:cTn id="14" presetID="10" presetClass="entr" presetSubtype="0" fill="hold" grpId="0" nodeType="withEffect">
+                                  <p:stCondLst>
+                                    <p:cond delay="360"/>
                                   </p:stCondLst>
                                   <p:childTnLst>
                                     <p:set>
@@ -8806,7 +9082,7 @@
                               <p:par>
                                 <p:cTn id="17" presetID="10" presetClass="entr" presetSubtype="0" fill="hold" nodeType="withEffect">
                                   <p:stCondLst>
-                                    <p:cond delay="400"/>
+                                    <p:cond delay="480"/>
                                   </p:stCondLst>
                                   <p:childTnLst>
                                     <p:set>
@@ -8841,7 +9117,7 @@
                               <p:par>
                                 <p:cTn id="20" presetID="10" presetClass="entr" presetSubtype="0" fill="hold" grpId="0" nodeType="withEffect">
                                   <p:stCondLst>
-                                    <p:cond delay="500"/>
+                                    <p:cond delay="600"/>
                                   </p:stCondLst>
                                   <p:childTnLst>
                                     <p:set>
@@ -8876,7 +9152,7 @@
                               <p:par>
                                 <p:cTn id="23" presetID="10" presetClass="entr" presetSubtype="0" fill="hold" grpId="0" nodeType="withEffect">
                                   <p:stCondLst>
-                                    <p:cond delay="600"/>
+                                    <p:cond delay="720"/>
                                   </p:stCondLst>
                                   <p:childTnLst>
                                     <p:set>
@@ -8909,9 +9185,9 @@
                                 </p:cTn>
                               </p:par>
                               <p:par>
-                                <p:cTn id="26" presetID="10" presetClass="entr" presetSubtype="0" fill="hold" nodeType="withEffect">
-                                  <p:stCondLst>
-                                    <p:cond delay="700"/>
+                                <p:cTn id="26" presetID="10" presetClass="entr" presetSubtype="0" fill="hold" grpId="0" nodeType="withEffect">
+                                  <p:stCondLst>
+                                    <p:cond delay="840"/>
                                   </p:stCondLst>
                                   <p:childTnLst>
                                     <p:set>
@@ -8944,9 +9220,9 @@
                                 </p:cTn>
                               </p:par>
                               <p:par>
-                                <p:cTn id="29" presetID="10" presetClass="entr" presetSubtype="0" fill="hold" nodeType="withEffect">
-                                  <p:stCondLst>
-                                    <p:cond delay="800"/>
+                                <p:cTn id="29" presetID="10" presetClass="entr" presetSubtype="0" fill="hold" grpId="0" nodeType="withEffect">
+                                  <p:stCondLst>
+                                    <p:cond delay="960"/>
                                   </p:stCondLst>
                                   <p:childTnLst>
                                     <p:set>
@@ -8981,7 +9257,7 @@
                               <p:par>
                                 <p:cTn id="32" presetID="10" presetClass="entr" presetSubtype="0" fill="hold" nodeType="withEffect">
                                   <p:stCondLst>
-                                    <p:cond delay="900"/>
+                                    <p:cond delay="1080"/>
                                   </p:stCondLst>
                                   <p:childTnLst>
                                     <p:set>
@@ -9016,7 +9292,7 @@
                               <p:par>
                                 <p:cTn id="35" presetID="10" presetClass="entr" presetSubtype="0" fill="hold" grpId="0" nodeType="withEffect">
                                   <p:stCondLst>
-                                    <p:cond delay="900"/>
+                                    <p:cond delay="1080"/>
                                   </p:stCondLst>
                                   <p:childTnLst>
                                     <p:set>
@@ -9051,7 +9327,7 @@
                               <p:par>
                                 <p:cTn id="38" presetID="10" presetClass="entr" presetSubtype="0" fill="hold" grpId="0" nodeType="withEffect">
                                   <p:stCondLst>
-                                    <p:cond delay="900"/>
+                                    <p:cond delay="1080"/>
                                   </p:stCondLst>
                                   <p:childTnLst>
                                     <p:set>
@@ -9084,9 +9360,9 @@
                                 </p:cTn>
                               </p:par>
                               <p:par>
-                                <p:cTn id="41" presetID="10" presetClass="entr" presetSubtype="0" fill="hold" nodeType="withEffect">
-                                  <p:stCondLst>
-                                    <p:cond delay="900"/>
+                                <p:cTn id="41" presetID="10" presetClass="entr" presetSubtype="0" fill="hold" grpId="0" nodeType="withEffect">
+                                  <p:stCondLst>
+                                    <p:cond delay="1080"/>
                                   </p:stCondLst>
                                   <p:childTnLst>
                                     <p:set>
@@ -9119,9 +9395,9 @@
                                 </p:cTn>
                               </p:par>
                               <p:par>
-                                <p:cTn id="44" presetID="10" presetClass="entr" presetSubtype="0" fill="hold" nodeType="withEffect">
-                                  <p:stCondLst>
-                                    <p:cond delay="900"/>
+                                <p:cTn id="44" presetID="10" presetClass="entr" presetSubtype="0" fill="hold" grpId="0" nodeType="withEffect">
+                                  <p:stCondLst>
+                                    <p:cond delay="1080"/>
                                   </p:stCondLst>
                                   <p:childTnLst>
                                     <p:set>
@@ -9156,7 +9432,7 @@
                               <p:par>
                                 <p:cTn id="47" presetID="10" presetClass="entr" presetSubtype="0" fill="hold" nodeType="withEffect">
                                   <p:stCondLst>
-                                    <p:cond delay="900"/>
+                                    <p:cond delay="1080"/>
                                   </p:stCondLst>
                                   <p:childTnLst>
                                     <p:set>
@@ -9191,7 +9467,7 @@
                               <p:par>
                                 <p:cTn id="50" presetID="10" presetClass="entr" presetSubtype="0" fill="hold" grpId="0" nodeType="withEffect">
                                   <p:stCondLst>
-                                    <p:cond delay="900"/>
+                                    <p:cond delay="1080"/>
                                   </p:stCondLst>
                                   <p:childTnLst>
                                     <p:set>
@@ -9226,7 +9502,7 @@
                               <p:par>
                                 <p:cTn id="53" presetID="10" presetClass="entr" presetSubtype="0" fill="hold" grpId="0" nodeType="withEffect">
                                   <p:stCondLst>
-                                    <p:cond delay="900"/>
+                                    <p:cond delay="1080"/>
                                   </p:stCondLst>
                                   <p:childTnLst>
                                     <p:set>
@@ -9261,7 +9537,7 @@
                               <p:par>
                                 <p:cTn id="56" presetID="10" presetClass="entr" presetSubtype="0" fill="hold" grpId="0" nodeType="withEffect">
                                   <p:stCondLst>
-                                    <p:cond delay="900"/>
+                                    <p:cond delay="1080"/>
                                   </p:stCondLst>
                                   <p:childTnLst>
                                     <p:set>
@@ -9323,10 +9599,16 @@
     <p:bldLst>
       <p:bldP spid="2" grpId="0" animBg="1"/>
       <p:bldP spid="3" grpId="0" animBg="1"/>
+      <p:bldP spid="4" grpId="0" animBg="1"/>
+      <p:bldP spid="5" grpId="0" animBg="1"/>
       <p:bldP spid="7" grpId="0" animBg="1"/>
       <p:bldP spid="8" grpId="0" animBg="1"/>
+      <p:bldP spid="9" grpId="0" animBg="1"/>
+      <p:bldP spid="10" grpId="0" animBg="1"/>
       <p:bldP spid="12" grpId="0" animBg="1"/>
       <p:bldP spid="13" grpId="0" animBg="1"/>
+      <p:bldP spid="14" grpId="0" animBg="1"/>
+      <p:bldP spid="15" grpId="0" animBg="1"/>
       <p:bldP spid="17" grpId="0" animBg="1"/>
       <p:bldP spid="18" grpId="0" animBg="1"/>
       <p:bldP spid="19" grpId="0" animBg="1"/>
@@ -9477,6 +9759,13 @@
             </a:outerShdw>
           </a:effectLst>
         </p:spPr>
+        <p:txBody>
+          <a:bodyPr/>
+          <a:lstStyle/>
+          <a:p>
+            <a:endParaRPr lang="en-IN"/>
+          </a:p>
+        </p:txBody>
       </p:sp>
       <p:sp>
         <p:nvSpPr>
@@ -9634,6 +9923,13 @@
             </a:outerShdw>
           </a:effectLst>
         </p:spPr>
+        <p:txBody>
+          <a:bodyPr/>
+          <a:lstStyle/>
+          <a:p>
+            <a:endParaRPr lang="en-IN"/>
+          </a:p>
+        </p:txBody>
       </p:sp>
       <p:sp>
         <p:nvSpPr>
@@ -9791,6 +10087,13 @@
             </a:outerShdw>
           </a:effectLst>
         </p:spPr>
+        <p:txBody>
+          <a:bodyPr/>
+          <a:lstStyle/>
+          <a:p>
+            <a:endParaRPr lang="en-IN"/>
+          </a:p>
+        </p:txBody>
       </p:sp>
       <p:sp>
         <p:nvSpPr>
@@ -9948,6 +10251,13 @@
             </a:outerShdw>
           </a:effectLst>
         </p:spPr>
+        <p:txBody>
+          <a:bodyPr/>
+          <a:lstStyle/>
+          <a:p>
+            <a:endParaRPr lang="en-IN"/>
+          </a:p>
+        </p:txBody>
       </p:sp>
       <p:sp>
         <p:nvSpPr>
@@ -10194,9 +10504,26 @@
   <p:clrMapOvr>
     <a:masterClrMapping/>
   </p:clrMapOvr>
-  <p:transition spd="slow">
-    <p:fade/>
-  </p:transition>
+  <mc:AlternateContent xmlns:mc="http://schemas.openxmlformats.org/markup-compatibility/2006" xmlns:p14="http://schemas.microsoft.com/office/powerpoint/2010/main">
+    <mc:Choice Requires="p14">
+      <p:transition spd="slow" p14:dur="1200">
+        <p:extLst>
+          <p:ext uri="{EAC30AE4-FB1A-49FA-B60E-2F6A631AC59A}">
+            <p14:morph xmlns="" p14:option="byObject"/>
+          </p:ext>
+        </p:extLst>
+      </p:transition>
+    </mc:Choice>
+    <mc:Fallback xmlns="">
+      <p:transition spd="slow">
+        <p:extLst>
+          <p:ext uri="{EAC30AE4-FB1A-49FA-B60E-2F6A631AC59A}">
+            <p14:morph xmlns:p14="http://schemas.microsoft.com/office/powerpoint/2010/main" xmlns="" p14:option="byObject"/>
+          </p:ext>
+        </p:extLst>
+      </p:transition>
+    </mc:Fallback>
+  </mc:AlternateContent>
   <p:timing>
     <p:tnLst>
       <p:par>
@@ -10258,7 +10585,7 @@
                               <p:par>
                                 <p:cTn id="8" presetID="10" presetClass="entr" presetSubtype="0" fill="hold" grpId="0" nodeType="withEffect">
                                   <p:stCondLst>
-                                    <p:cond delay="100"/>
+                                    <p:cond delay="120"/>
                                   </p:stCondLst>
                                   <p:childTnLst>
                                     <p:set>
@@ -10291,9 +10618,9 @@
                                 </p:cTn>
                               </p:par>
                               <p:par>
-                                <p:cTn id="11" presetID="10" presetClass="entr" presetSubtype="0" fill="hold" nodeType="withEffect">
-                                  <p:stCondLst>
-                                    <p:cond delay="200"/>
+                                <p:cTn id="11" presetID="10" presetClass="entr" presetSubtype="0" fill="hold" grpId="0" nodeType="withEffect">
+                                  <p:stCondLst>
+                                    <p:cond delay="240"/>
                                   </p:stCondLst>
                                   <p:childTnLst>
                                     <p:set>
@@ -10328,7 +10655,7 @@
                               <p:par>
                                 <p:cTn id="14" presetID="10" presetClass="entr" presetSubtype="0" fill="hold" grpId="0" nodeType="withEffect">
                                   <p:stCondLst>
-                                    <p:cond delay="300"/>
+                                    <p:cond delay="360"/>
                                   </p:stCondLst>
                                   <p:childTnLst>
                                     <p:set>
@@ -10363,7 +10690,7 @@
                               <p:par>
                                 <p:cTn id="17" presetID="10" presetClass="entr" presetSubtype="0" fill="hold" grpId="0" nodeType="withEffect">
                                   <p:stCondLst>
-                                    <p:cond delay="400"/>
+                                    <p:cond delay="480"/>
                                   </p:stCondLst>
                                   <p:childTnLst>
                                     <p:set>
@@ -10398,7 +10725,7 @@
                               <p:par>
                                 <p:cTn id="20" presetID="10" presetClass="entr" presetSubtype="0" fill="hold" grpId="0" nodeType="withEffect">
                                   <p:stCondLst>
-                                    <p:cond delay="500"/>
+                                    <p:cond delay="600"/>
                                   </p:stCondLst>
                                   <p:childTnLst>
                                     <p:set>
@@ -10431,9 +10758,9 @@
                                 </p:cTn>
                               </p:par>
                               <p:par>
-                                <p:cTn id="23" presetID="10" presetClass="entr" presetSubtype="0" fill="hold" nodeType="withEffect">
-                                  <p:stCondLst>
-                                    <p:cond delay="600"/>
+                                <p:cTn id="23" presetID="10" presetClass="entr" presetSubtype="0" fill="hold" grpId="0" nodeType="withEffect">
+                                  <p:stCondLst>
+                                    <p:cond delay="720"/>
                                   </p:stCondLst>
                                   <p:childTnLst>
                                     <p:set>
@@ -10468,7 +10795,7 @@
                               <p:par>
                                 <p:cTn id="26" presetID="10" presetClass="entr" presetSubtype="0" fill="hold" grpId="0" nodeType="withEffect">
                                   <p:stCondLst>
-                                    <p:cond delay="700"/>
+                                    <p:cond delay="840"/>
                                   </p:stCondLst>
                                   <p:childTnLst>
                                     <p:set>
@@ -10503,7 +10830,7 @@
                               <p:par>
                                 <p:cTn id="29" presetID="10" presetClass="entr" presetSubtype="0" fill="hold" grpId="0" nodeType="withEffect">
                                   <p:stCondLst>
-                                    <p:cond delay="800"/>
+                                    <p:cond delay="960"/>
                                   </p:stCondLst>
                                   <p:childTnLst>
                                     <p:set>
@@ -10538,7 +10865,7 @@
                               <p:par>
                                 <p:cTn id="32" presetID="10" presetClass="entr" presetSubtype="0" fill="hold" grpId="0" nodeType="withEffect">
                                   <p:stCondLst>
-                                    <p:cond delay="900"/>
+                                    <p:cond delay="1080"/>
                                   </p:stCondLst>
                                   <p:childTnLst>
                                     <p:set>
@@ -10571,9 +10898,9 @@
                                 </p:cTn>
                               </p:par>
                               <p:par>
-                                <p:cTn id="35" presetID="10" presetClass="entr" presetSubtype="0" fill="hold" nodeType="withEffect">
-                                  <p:stCondLst>
-                                    <p:cond delay="900"/>
+                                <p:cTn id="35" presetID="10" presetClass="entr" presetSubtype="0" fill="hold" grpId="0" nodeType="withEffect">
+                                  <p:stCondLst>
+                                    <p:cond delay="1080"/>
                                   </p:stCondLst>
                                   <p:childTnLst>
                                     <p:set>
@@ -10608,7 +10935,7 @@
                               <p:par>
                                 <p:cTn id="38" presetID="10" presetClass="entr" presetSubtype="0" fill="hold" grpId="0" nodeType="withEffect">
                                   <p:stCondLst>
-                                    <p:cond delay="900"/>
+                                    <p:cond delay="1080"/>
                                   </p:stCondLst>
                                   <p:childTnLst>
                                     <p:set>
@@ -10643,7 +10970,7 @@
                               <p:par>
                                 <p:cTn id="41" presetID="10" presetClass="entr" presetSubtype="0" fill="hold" grpId="0" nodeType="withEffect">
                                   <p:stCondLst>
-                                    <p:cond delay="900"/>
+                                    <p:cond delay="1080"/>
                                   </p:stCondLst>
                                   <p:childTnLst>
                                     <p:set>
@@ -10678,7 +11005,7 @@
                               <p:par>
                                 <p:cTn id="44" presetID="10" presetClass="entr" presetSubtype="0" fill="hold" grpId="0" nodeType="withEffect">
                                   <p:stCondLst>
-                                    <p:cond delay="900"/>
+                                    <p:cond delay="1080"/>
                                   </p:stCondLst>
                                   <p:childTnLst>
                                     <p:set>
@@ -10711,9 +11038,9 @@
                                 </p:cTn>
                               </p:par>
                               <p:par>
-                                <p:cTn id="47" presetID="10" presetClass="entr" presetSubtype="0" fill="hold" nodeType="withEffect">
-                                  <p:stCondLst>
-                                    <p:cond delay="900"/>
+                                <p:cTn id="47" presetID="10" presetClass="entr" presetSubtype="0" fill="hold" grpId="0" nodeType="withEffect">
+                                  <p:stCondLst>
+                                    <p:cond delay="1080"/>
                                   </p:stCondLst>
                                   <p:childTnLst>
                                     <p:set>
@@ -10748,7 +11075,7 @@
                               <p:par>
                                 <p:cTn id="50" presetID="10" presetClass="entr" presetSubtype="0" fill="hold" grpId="0" nodeType="withEffect">
                                   <p:stCondLst>
-                                    <p:cond delay="900"/>
+                                    <p:cond delay="1080"/>
                                   </p:stCondLst>
                                   <p:childTnLst>
                                     <p:set>
@@ -10783,7 +11110,7 @@
                               <p:par>
                                 <p:cTn id="53" presetID="10" presetClass="entr" presetSubtype="0" fill="hold" grpId="0" nodeType="withEffect">
                                   <p:stCondLst>
-                                    <p:cond delay="900"/>
+                                    <p:cond delay="1080"/>
                                   </p:stCondLst>
                                   <p:childTnLst>
                                     <p:set>
@@ -10818,7 +11145,7 @@
                               <p:par>
                                 <p:cTn id="56" presetID="10" presetClass="entr" presetSubtype="0" fill="hold" grpId="0" nodeType="withEffect">
                                   <p:stCondLst>
-                                    <p:cond delay="900"/>
+                                    <p:cond delay="1080"/>
                                   </p:stCondLst>
                                   <p:childTnLst>
                                     <p:set>
@@ -10853,7 +11180,7 @@
                               <p:par>
                                 <p:cTn id="59" presetID="10" presetClass="entr" presetSubtype="0" fill="hold" grpId="0" nodeType="withEffect">
                                   <p:stCondLst>
-                                    <p:cond delay="900"/>
+                                    <p:cond delay="1080"/>
                                   </p:stCondLst>
                                   <p:childTnLst>
                                     <p:set>
@@ -10915,15 +11242,19 @@
     <p:bldLst>
       <p:bldP spid="2" grpId="0" animBg="1"/>
       <p:bldP spid="3" grpId="0" animBg="1"/>
+      <p:bldP spid="4" grpId="0" animBg="1"/>
       <p:bldP spid="5" grpId="0" animBg="1"/>
       <p:bldP spid="6" grpId="0" animBg="1"/>
       <p:bldP spid="7" grpId="0" animBg="1"/>
+      <p:bldP spid="8" grpId="0" animBg="1"/>
       <p:bldP spid="9" grpId="0" animBg="1"/>
       <p:bldP spid="10" grpId="0" animBg="1"/>
       <p:bldP spid="11" grpId="0" animBg="1"/>
+      <p:bldP spid="12" grpId="0" animBg="1"/>
       <p:bldP spid="13" grpId="0" animBg="1"/>
       <p:bldP spid="14" grpId="0" animBg="1"/>
       <p:bldP spid="15" grpId="0" animBg="1"/>
+      <p:bldP spid="16" grpId="0" animBg="1"/>
       <p:bldP spid="17" grpId="0" animBg="1"/>
       <p:bldP spid="18" grpId="0" animBg="1"/>
       <p:bldP spid="19" grpId="0" animBg="1"/>
@@ -11172,9 +11503,26 @@
   <p:clrMapOvr>
     <a:masterClrMapping/>
   </p:clrMapOvr>
-  <p:transition spd="slow">
-    <p:fade/>
-  </p:transition>
+  <mc:AlternateContent xmlns:mc="http://schemas.openxmlformats.org/markup-compatibility/2006" xmlns:p14="http://schemas.microsoft.com/office/powerpoint/2010/main">
+    <mc:Choice Requires="p14">
+      <p:transition spd="slow" p14:dur="1200">
+        <p:extLst>
+          <p:ext uri="{EAC30AE4-FB1A-49FA-B60E-2F6A631AC59A}">
+            <p14:morph xmlns="" p14:option="byObject"/>
+          </p:ext>
+        </p:extLst>
+      </p:transition>
+    </mc:Choice>
+    <mc:Fallback xmlns="">
+      <p:transition spd="slow">
+        <p:extLst>
+          <p:ext uri="{EAC30AE4-FB1A-49FA-B60E-2F6A631AC59A}">
+            <p14:morph xmlns:p14="http://schemas.microsoft.com/office/powerpoint/2010/main" xmlns="" p14:option="byObject"/>
+          </p:ext>
+        </p:extLst>
+      </p:transition>
+    </mc:Fallback>
+  </mc:AlternateContent>
   <p:timing>
     <p:tnLst>
       <p:par>
@@ -11236,7 +11584,7 @@
                               <p:par>
                                 <p:cTn id="8" presetID="10" presetClass="entr" presetSubtype="0" fill="hold" grpId="0" nodeType="withEffect">
                                   <p:stCondLst>
-                                    <p:cond delay="100"/>
+                                    <p:cond delay="120"/>
                                   </p:stCondLst>
                                   <p:childTnLst>
                                     <p:set>
@@ -11271,7 +11619,7 @@
                               <p:par>
                                 <p:cTn id="11" presetID="10" presetClass="entr" presetSubtype="0" fill="hold" grpId="0" nodeType="withEffect">
                                   <p:stCondLst>
-                                    <p:cond delay="200"/>
+                                    <p:cond delay="240"/>
                                   </p:stCondLst>
                                   <p:childTnLst>
                                     <p:set>
@@ -11306,7 +11654,7 @@
                               <p:par>
                                 <p:cTn id="14" presetID="10" presetClass="entr" presetSubtype="0" fill="hold" grpId="0" nodeType="withEffect">
                                   <p:stCondLst>
-                                    <p:cond delay="300"/>
+                                    <p:cond delay="360"/>
                                   </p:stCondLst>
                                   <p:childTnLst>
                                     <p:set>
@@ -11341,7 +11689,7 @@
                               <p:par>
                                 <p:cTn id="17" presetID="10" presetClass="entr" presetSubtype="0" fill="hold" grpId="0" nodeType="withEffect">
                                   <p:stCondLst>
-                                    <p:cond delay="400"/>
+                                    <p:cond delay="480"/>
                                   </p:stCondLst>
                                   <p:childTnLst>
                                     <p:set>
@@ -11659,6 +12007,13 @@
             </a:outerShdw>
           </a:effectLst>
         </p:spPr>
+        <p:txBody>
+          <a:bodyPr/>
+          <a:lstStyle/>
+          <a:p>
+            <a:endParaRPr lang="en-IN"/>
+          </a:p>
+        </p:txBody>
       </p:sp>
       <p:sp>
         <p:nvSpPr>
@@ -11725,6 +12080,13 @@
             <a:prstDash val="solid"/>
           </a:ln>
         </p:spPr>
+        <p:txBody>
+          <a:bodyPr/>
+          <a:lstStyle/>
+          <a:p>
+            <a:endParaRPr lang="en-IN"/>
+          </a:p>
+        </p:txBody>
       </p:sp>
       <p:sp>
         <p:nvSpPr>
@@ -11830,6 +12192,13 @@
             <a:prstDash val="solid"/>
           </a:ln>
         </p:spPr>
+        <p:txBody>
+          <a:bodyPr/>
+          <a:lstStyle/>
+          <a:p>
+            <a:endParaRPr lang="en-IN"/>
+          </a:p>
+        </p:txBody>
       </p:sp>
       <p:sp>
         <p:nvSpPr>
@@ -11990,14 +12359,61 @@
           </a:p>
         </p:txBody>
       </p:sp>
+      <p:pic>
+        <p:nvPicPr>
+          <p:cNvPr id="17" name="!!logo">
+            <a:extLst>
+              <a:ext uri="{FF2B5EF4-FFF2-40B4-BE49-F238E27FC236}">
+                <a16:creationId xmlns:a16="http://schemas.microsoft.com/office/drawing/2014/main" id="{BE145122-2510-B44F-229F-BFCC5B142D53}"/>
+              </a:ext>
+            </a:extLst>
+          </p:cNvPr>
+          <p:cNvPicPr>
+            <a:picLocks/>
+          </p:cNvPicPr>
+          <p:nvPr/>
+        </p:nvPicPr>
+        <p:blipFill>
+          <a:blip r:embed="rId4"/>
+          <a:stretch>
+            <a:fillRect/>
+          </a:stretch>
+        </p:blipFill>
+        <p:spPr>
+          <a:xfrm>
+            <a:off x="10932160" y="508000"/>
+            <a:ext cx="548640" cy="548640"/>
+          </a:xfrm>
+          <a:prstGeom prst="rect">
+            <a:avLst/>
+          </a:prstGeom>
+        </p:spPr>
+      </p:pic>
     </p:spTree>
   </p:cSld>
   <p:clrMapOvr>
     <a:masterClrMapping/>
   </p:clrMapOvr>
-  <p:transition spd="slow">
-    <p:fade/>
-  </p:transition>
+  <mc:AlternateContent xmlns:mc="http://schemas.openxmlformats.org/markup-compatibility/2006" xmlns:p14="http://schemas.microsoft.com/office/powerpoint/2010/main">
+    <mc:Choice Requires="p14">
+      <p:transition spd="slow" p14:dur="1200">
+        <p:extLst>
+          <p:ext uri="{EAC30AE4-FB1A-49FA-B60E-2F6A631AC59A}">
+            <p14:morph xmlns="" p14:option="byObject"/>
+          </p:ext>
+        </p:extLst>
+      </p:transition>
+    </mc:Choice>
+    <mc:Fallback xmlns="">
+      <p:transition spd="slow">
+        <p:extLst>
+          <p:ext uri="{EAC30AE4-FB1A-49FA-B60E-2F6A631AC59A}">
+            <p14:morph xmlns:p14="http://schemas.microsoft.com/office/powerpoint/2010/main" xmlns="" p14:option="byObject"/>
+          </p:ext>
+        </p:extLst>
+      </p:transition>
+    </mc:Fallback>
+  </mc:AlternateContent>
   <p:timing>
     <p:tnLst>
       <p:par>
@@ -12059,7 +12475,7 @@
                               <p:par>
                                 <p:cTn id="8" presetID="10" presetClass="entr" presetSubtype="0" fill="hold" grpId="0" nodeType="withEffect">
                                   <p:stCondLst>
-                                    <p:cond delay="100"/>
+                                    <p:cond delay="120"/>
                                   </p:stCondLst>
                                   <p:childTnLst>
                                     <p:set>
@@ -12094,7 +12510,7 @@
                               <p:par>
                                 <p:cTn id="11" presetID="10" presetClass="entr" presetSubtype="0" fill="hold" grpId="0" nodeType="withEffect">
                                   <p:stCondLst>
-                                    <p:cond delay="200"/>
+                                    <p:cond delay="240"/>
                                   </p:stCondLst>
                                   <p:childTnLst>
                                     <p:set>
@@ -12129,7 +12545,7 @@
                               <p:par>
                                 <p:cTn id="14" presetID="10" presetClass="entr" presetSubtype="0" fill="hold" grpId="0" nodeType="withEffect">
                                   <p:stCondLst>
-                                    <p:cond delay="300"/>
+                                    <p:cond delay="360"/>
                                   </p:stCondLst>
                                   <p:childTnLst>
                                     <p:set>
@@ -12162,9 +12578,9 @@
                                 </p:cTn>
                               </p:par>
                               <p:par>
-                                <p:cTn id="17" presetID="10" presetClass="entr" presetSubtype="0" fill="hold" nodeType="withEffect">
-                                  <p:stCondLst>
-                                    <p:cond delay="400"/>
+                                <p:cTn id="17" presetID="10" presetClass="entr" presetSubtype="0" fill="hold" grpId="0" nodeType="withEffect">
+                                  <p:stCondLst>
+                                    <p:cond delay="480"/>
                                   </p:stCondLst>
                                   <p:childTnLst>
                                     <p:set>
@@ -12199,7 +12615,7 @@
                               <p:par>
                                 <p:cTn id="20" presetID="10" presetClass="entr" presetSubtype="0" fill="hold" grpId="0" nodeType="withEffect">
                                   <p:stCondLst>
-                                    <p:cond delay="500"/>
+                                    <p:cond delay="600"/>
                                   </p:stCondLst>
                                   <p:childTnLst>
                                     <p:set>
@@ -12232,9 +12648,9 @@
                                 </p:cTn>
                               </p:par>
                               <p:par>
-                                <p:cTn id="23" presetID="10" presetClass="entr" presetSubtype="0" fill="hold" nodeType="withEffect">
-                                  <p:stCondLst>
-                                    <p:cond delay="600"/>
+                                <p:cTn id="23" presetID="10" presetClass="entr" presetSubtype="0" fill="hold" grpId="0" nodeType="withEffect">
+                                  <p:stCondLst>
+                                    <p:cond delay="720"/>
                                   </p:stCondLst>
                                   <p:childTnLst>
                                     <p:set>
@@ -12269,7 +12685,7 @@
                               <p:par>
                                 <p:cTn id="26" presetID="10" presetClass="entr" presetSubtype="0" fill="hold" grpId="0" nodeType="withEffect">
                                   <p:stCondLst>
-                                    <p:cond delay="700"/>
+                                    <p:cond delay="840"/>
                                   </p:stCondLst>
                                   <p:childTnLst>
                                     <p:set>
@@ -12304,7 +12720,7 @@
                               <p:par>
                                 <p:cTn id="29" presetID="10" presetClass="entr" presetSubtype="0" fill="hold" grpId="0" nodeType="withEffect">
                                   <p:stCondLst>
-                                    <p:cond delay="800"/>
+                                    <p:cond delay="960"/>
                                   </p:stCondLst>
                                   <p:childTnLst>
                                     <p:set>
@@ -12337,9 +12753,9 @@
                                 </p:cTn>
                               </p:par>
                               <p:par>
-                                <p:cTn id="32" presetID="10" presetClass="entr" presetSubtype="0" fill="hold" nodeType="withEffect">
-                                  <p:stCondLst>
-                                    <p:cond delay="900"/>
+                                <p:cTn id="32" presetID="10" presetClass="entr" presetSubtype="0" fill="hold" grpId="0" nodeType="withEffect">
+                                  <p:stCondLst>
+                                    <p:cond delay="1080"/>
                                   </p:stCondLst>
                                   <p:childTnLst>
                                     <p:set>
@@ -12374,7 +12790,7 @@
                               <p:par>
                                 <p:cTn id="35" presetID="10" presetClass="entr" presetSubtype="0" fill="hold" grpId="0" nodeType="withEffect">
                                   <p:stCondLst>
-                                    <p:cond delay="900"/>
+                                    <p:cond delay="1080"/>
                                   </p:stCondLst>
                                   <p:childTnLst>
                                     <p:set>
@@ -12409,7 +12825,7 @@
                               <p:par>
                                 <p:cTn id="38" presetID="10" presetClass="entr" presetSubtype="0" fill="hold" grpId="0" nodeType="withEffect">
                                   <p:stCondLst>
-                                    <p:cond delay="900"/>
+                                    <p:cond delay="1080"/>
                                   </p:stCondLst>
                                   <p:childTnLst>
                                     <p:set>
@@ -12473,9 +12889,12 @@
       <p:bldP spid="3" grpId="0" animBg="1"/>
       <p:bldP spid="4" grpId="0" animBg="1"/>
       <p:bldP spid="5" grpId="0" animBg="1"/>
+      <p:bldP spid="6" grpId="0" animBg="1"/>
       <p:bldP spid="7" grpId="0" animBg="1"/>
+      <p:bldP spid="8" grpId="0" animBg="1"/>
       <p:bldP spid="9" grpId="0" animBg="1"/>
       <p:bldP spid="10" grpId="0" animBg="1"/>
+      <p:bldP spid="11" grpId="0" animBg="1"/>
       <p:bldP spid="12" grpId="0" animBg="1"/>
       <p:bldP spid="13" grpId="0" animBg="1"/>
     </p:bldLst>
@@ -12732,6 +13151,13 @@
             </a:outerShdw>
           </a:effectLst>
         </p:spPr>
+        <p:txBody>
+          <a:bodyPr/>
+          <a:lstStyle/>
+          <a:p>
+            <a:endParaRPr lang="en-IN"/>
+          </a:p>
+        </p:txBody>
       </p:sp>
       <p:sp>
         <p:nvSpPr>
@@ -12976,9 +13402,26 @@
   <p:clrMapOvr>
     <a:masterClrMapping/>
   </p:clrMapOvr>
-  <p:transition spd="slow">
-    <p:fade/>
-  </p:transition>
+  <mc:AlternateContent xmlns:mc="http://schemas.openxmlformats.org/markup-compatibility/2006" xmlns:p14="http://schemas.microsoft.com/office/powerpoint/2010/main">
+    <mc:Choice Requires="p14">
+      <p:transition spd="slow" p14:dur="1200">
+        <p:extLst>
+          <p:ext uri="{EAC30AE4-FB1A-49FA-B60E-2F6A631AC59A}">
+            <p14:morph xmlns="" p14:option="byObject"/>
+          </p:ext>
+        </p:extLst>
+      </p:transition>
+    </mc:Choice>
+    <mc:Fallback xmlns="">
+      <p:transition spd="slow">
+        <p:extLst>
+          <p:ext uri="{EAC30AE4-FB1A-49FA-B60E-2F6A631AC59A}">
+            <p14:morph xmlns:p14="http://schemas.microsoft.com/office/powerpoint/2010/main" xmlns="" p14:option="byObject"/>
+          </p:ext>
+        </p:extLst>
+      </p:transition>
+    </mc:Fallback>
+  </mc:AlternateContent>
   <p:timing>
     <p:tnLst>
       <p:par>
@@ -13040,7 +13483,7 @@
                               <p:par>
                                 <p:cTn id="8" presetID="10" presetClass="entr" presetSubtype="0" fill="hold" grpId="0" nodeType="withEffect">
                                   <p:stCondLst>
-                                    <p:cond delay="100"/>
+                                    <p:cond delay="120"/>
                                   </p:stCondLst>
                                   <p:childTnLst>
                                     <p:set>
@@ -13075,7 +13518,7 @@
                               <p:par>
                                 <p:cTn id="11" presetID="10" presetClass="entr" presetSubtype="0" fill="hold" grpId="0" nodeType="withEffect">
                                   <p:stCondLst>
-                                    <p:cond delay="200"/>
+                                    <p:cond delay="240"/>
                                   </p:stCondLst>
                                   <p:childTnLst>
                                     <p:set>
@@ -13110,7 +13553,7 @@
                               <p:par>
                                 <p:cTn id="14" presetID="10" presetClass="entr" presetSubtype="0" fill="hold" grpId="0" nodeType="withEffect">
                                   <p:stCondLst>
-                                    <p:cond delay="300"/>
+                                    <p:cond delay="360"/>
                                   </p:stCondLst>
                                   <p:childTnLst>
                                     <p:set>
@@ -13143,9 +13586,9 @@
                                 </p:cTn>
                               </p:par>
                               <p:par>
-                                <p:cTn id="17" presetID="10" presetClass="entr" presetSubtype="0" fill="hold" nodeType="withEffect">
-                                  <p:stCondLst>
-                                    <p:cond delay="400"/>
+                                <p:cTn id="17" presetID="10" presetClass="entr" presetSubtype="0" fill="hold" grpId="0" nodeType="withEffect">
+                                  <p:stCondLst>
+                                    <p:cond delay="480"/>
                                   </p:stCondLst>
                                   <p:childTnLst>
                                     <p:set>
@@ -13180,7 +13623,7 @@
                               <p:par>
                                 <p:cTn id="20" presetID="10" presetClass="entr" presetSubtype="0" fill="hold" grpId="0" nodeType="withEffect">
                                   <p:stCondLst>
-                                    <p:cond delay="500"/>
+                                    <p:cond delay="600"/>
                                   </p:stCondLst>
                                   <p:childTnLst>
                                     <p:set>
@@ -13215,7 +13658,7 @@
                               <p:par>
                                 <p:cTn id="23" presetID="10" presetClass="entr" presetSubtype="0" fill="hold" grpId="0" nodeType="withEffect">
                                   <p:stCondLst>
-                                    <p:cond delay="600"/>
+                                    <p:cond delay="720"/>
                                   </p:stCondLst>
                                   <p:childTnLst>
                                     <p:set>
@@ -13250,7 +13693,7 @@
                               <p:par>
                                 <p:cTn id="26" presetID="10" presetClass="entr" presetSubtype="0" fill="hold" grpId="0" nodeType="withEffect">
                                   <p:stCondLst>
-                                    <p:cond delay="700"/>
+                                    <p:cond delay="840"/>
                                   </p:stCondLst>
                                   <p:childTnLst>
                                     <p:set>
@@ -13314,6 +13757,7 @@
       <p:bldP spid="3" grpId="0" animBg="1"/>
       <p:bldP spid="4" grpId="0" animBg="1"/>
       <p:bldP spid="5" grpId="0" animBg="1"/>
+      <p:bldP spid="6" grpId="0" animBg="1"/>
       <p:bldP spid="7" grpId="0" animBg="1"/>
       <p:bldP spid="8" grpId="0" animBg="1"/>
       <p:bldP spid="9" grpId="0" animBg="1"/>
@@ -13487,6 +13931,13 @@
             </a:outerShdw>
           </a:effectLst>
         </p:spPr>
+        <p:txBody>
+          <a:bodyPr/>
+          <a:lstStyle/>
+          <a:p>
+            <a:endParaRPr lang="en-IN"/>
+          </a:p>
+        </p:txBody>
       </p:sp>
       <p:sp>
         <p:nvSpPr>
@@ -13654,6 +14105,13 @@
             <a:prstDash val="solid"/>
           </a:ln>
         </p:spPr>
+        <p:txBody>
+          <a:bodyPr/>
+          <a:lstStyle/>
+          <a:p>
+            <a:endParaRPr lang="en-IN"/>
+          </a:p>
+        </p:txBody>
       </p:sp>
       <p:pic>
         <p:nvPicPr>
@@ -13783,6 +14241,13 @@
             <a:prstDash val="solid"/>
           </a:ln>
         </p:spPr>
+        <p:txBody>
+          <a:bodyPr/>
+          <a:lstStyle/>
+          <a:p>
+            <a:endParaRPr lang="en-IN"/>
+          </a:p>
+        </p:txBody>
       </p:sp>
       <p:pic>
         <p:nvPicPr>
@@ -13912,6 +14377,13 @@
             <a:prstDash val="solid"/>
           </a:ln>
         </p:spPr>
+        <p:txBody>
+          <a:bodyPr/>
+          <a:lstStyle/>
+          <a:p>
+            <a:endParaRPr lang="en-IN"/>
+          </a:p>
+        </p:txBody>
       </p:sp>
       <p:pic>
         <p:nvPicPr>
@@ -14041,6 +14513,13 @@
             <a:prstDash val="solid"/>
           </a:ln>
         </p:spPr>
+        <p:txBody>
+          <a:bodyPr/>
+          <a:lstStyle/>
+          <a:p>
+            <a:endParaRPr lang="en-IN"/>
+          </a:p>
+        </p:txBody>
       </p:sp>
       <p:pic>
         <p:nvPicPr>
@@ -14266,9 +14745,26 @@
   <p:clrMapOvr>
     <a:masterClrMapping/>
   </p:clrMapOvr>
-  <p:transition spd="slow">
-    <p:fade/>
-  </p:transition>
+  <mc:AlternateContent xmlns:mc="http://schemas.openxmlformats.org/markup-compatibility/2006" xmlns:p14="http://schemas.microsoft.com/office/powerpoint/2010/main">
+    <mc:Choice Requires="p14">
+      <p:transition spd="slow" p14:dur="1200">
+        <p:extLst>
+          <p:ext uri="{EAC30AE4-FB1A-49FA-B60E-2F6A631AC59A}">
+            <p14:morph xmlns="" p14:option="byObject"/>
+          </p:ext>
+        </p:extLst>
+      </p:transition>
+    </mc:Choice>
+    <mc:Fallback xmlns="">
+      <p:transition spd="slow">
+        <p:extLst>
+          <p:ext uri="{EAC30AE4-FB1A-49FA-B60E-2F6A631AC59A}">
+            <p14:morph xmlns:p14="http://schemas.microsoft.com/office/powerpoint/2010/main" xmlns="" p14:option="byObject"/>
+          </p:ext>
+        </p:extLst>
+      </p:transition>
+    </mc:Fallback>
+  </mc:AlternateContent>
   <p:timing>
     <p:tnLst>
       <p:par>
@@ -14330,7 +14826,7 @@
                               <p:par>
                                 <p:cTn id="8" presetID="10" presetClass="entr" presetSubtype="0" fill="hold" grpId="0" nodeType="withEffect">
                                   <p:stCondLst>
-                                    <p:cond delay="100"/>
+                                    <p:cond delay="120"/>
                                   </p:stCondLst>
                                   <p:childTnLst>
                                     <p:set>
@@ -14363,9 +14859,9 @@
                                 </p:cTn>
                               </p:par>
                               <p:par>
-                                <p:cTn id="11" presetID="10" presetClass="entr" presetSubtype="0" fill="hold" nodeType="withEffect">
-                                  <p:stCondLst>
-                                    <p:cond delay="200"/>
+                                <p:cTn id="11" presetID="10" presetClass="entr" presetSubtype="0" fill="hold" grpId="0" nodeType="withEffect">
+                                  <p:stCondLst>
+                                    <p:cond delay="240"/>
                                   </p:stCondLst>
                                   <p:childTnLst>
                                     <p:set>
@@ -14400,7 +14896,7 @@
                               <p:par>
                                 <p:cTn id="14" presetID="10" presetClass="entr" presetSubtype="0" fill="hold" grpId="0" nodeType="withEffect">
                                   <p:stCondLst>
-                                    <p:cond delay="300"/>
+                                    <p:cond delay="360"/>
                                   </p:stCondLst>
                                   <p:childTnLst>
                                     <p:set>
@@ -14435,7 +14931,7 @@
                               <p:par>
                                 <p:cTn id="17" presetID="10" presetClass="entr" presetSubtype="0" fill="hold" grpId="0" nodeType="withEffect">
                                   <p:stCondLst>
-                                    <p:cond delay="400"/>
+                                    <p:cond delay="480"/>
                                   </p:stCondLst>
                                   <p:childTnLst>
                                     <p:set>
@@ -14470,7 +14966,7 @@
                               <p:par>
                                 <p:cTn id="20" presetID="10" presetClass="entr" presetSubtype="0" fill="hold" grpId="0" nodeType="withEffect">
                                   <p:stCondLst>
-                                    <p:cond delay="500"/>
+                                    <p:cond delay="600"/>
                                   </p:stCondLst>
                                   <p:childTnLst>
                                     <p:set>
@@ -14503,9 +14999,9 @@
                                 </p:cTn>
                               </p:par>
                               <p:par>
-                                <p:cTn id="23" presetID="10" presetClass="entr" presetSubtype="0" fill="hold" nodeType="withEffect">
-                                  <p:stCondLst>
-                                    <p:cond delay="600"/>
+                                <p:cTn id="23" presetID="10" presetClass="entr" presetSubtype="0" fill="hold" grpId="0" nodeType="withEffect">
+                                  <p:stCondLst>
+                                    <p:cond delay="720"/>
                                   </p:stCondLst>
                                   <p:childTnLst>
                                     <p:set>
@@ -14540,7 +15036,7 @@
                               <p:par>
                                 <p:cTn id="26" presetID="10" presetClass="entr" presetSubtype="0" fill="hold" nodeType="withEffect">
                                   <p:stCondLst>
-                                    <p:cond delay="700"/>
+                                    <p:cond delay="840"/>
                                   </p:stCondLst>
                                   <p:childTnLst>
                                     <p:set>
@@ -14575,7 +15071,7 @@
                               <p:par>
                                 <p:cTn id="29" presetID="10" presetClass="entr" presetSubtype="0" fill="hold" grpId="0" nodeType="withEffect">
                                   <p:stCondLst>
-                                    <p:cond delay="800"/>
+                                    <p:cond delay="960"/>
                                   </p:stCondLst>
                                   <p:childTnLst>
                                     <p:set>
@@ -14610,7 +15106,7 @@
                               <p:par>
                                 <p:cTn id="32" presetID="10" presetClass="entr" presetSubtype="0" fill="hold" grpId="0" nodeType="withEffect">
                                   <p:stCondLst>
-                                    <p:cond delay="900"/>
+                                    <p:cond delay="1080"/>
                                   </p:stCondLst>
                                   <p:childTnLst>
                                     <p:set>
@@ -14643,9 +15139,9 @@
                                 </p:cTn>
                               </p:par>
                               <p:par>
-                                <p:cTn id="35" presetID="10" presetClass="entr" presetSubtype="0" fill="hold" nodeType="withEffect">
-                                  <p:stCondLst>
-                                    <p:cond delay="900"/>
+                                <p:cTn id="35" presetID="10" presetClass="entr" presetSubtype="0" fill="hold" grpId="0" nodeType="withEffect">
+                                  <p:stCondLst>
+                                    <p:cond delay="1080"/>
                                   </p:stCondLst>
                                   <p:childTnLst>
                                     <p:set>
@@ -14680,7 +15176,7 @@
                               <p:par>
                                 <p:cTn id="38" presetID="10" presetClass="entr" presetSubtype="0" fill="hold" nodeType="withEffect">
                                   <p:stCondLst>
-                                    <p:cond delay="900"/>
+                                    <p:cond delay="1080"/>
                                   </p:stCondLst>
                                   <p:childTnLst>
                                     <p:set>
@@ -14715,7 +15211,7 @@
                               <p:par>
                                 <p:cTn id="41" presetID="10" presetClass="entr" presetSubtype="0" fill="hold" grpId="0" nodeType="withEffect">
                                   <p:stCondLst>
-                                    <p:cond delay="900"/>
+                                    <p:cond delay="1080"/>
                                   </p:stCondLst>
                                   <p:childTnLst>
                                     <p:set>
@@ -14750,7 +15246,7 @@
                               <p:par>
                                 <p:cTn id="44" presetID="10" presetClass="entr" presetSubtype="0" fill="hold" grpId="0" nodeType="withEffect">
                                   <p:stCondLst>
-                                    <p:cond delay="900"/>
+                                    <p:cond delay="1080"/>
                                   </p:stCondLst>
                                   <p:childTnLst>
                                     <p:set>
@@ -14783,9 +15279,9 @@
                                 </p:cTn>
                               </p:par>
                               <p:par>
-                                <p:cTn id="47" presetID="10" presetClass="entr" presetSubtype="0" fill="hold" nodeType="withEffect">
-                                  <p:stCondLst>
-                                    <p:cond delay="900"/>
+                                <p:cTn id="47" presetID="10" presetClass="entr" presetSubtype="0" fill="hold" grpId="0" nodeType="withEffect">
+                                  <p:stCondLst>
+                                    <p:cond delay="1080"/>
                                   </p:stCondLst>
                                   <p:childTnLst>
                                     <p:set>
@@ -14820,7 +15316,7 @@
                               <p:par>
                                 <p:cTn id="50" presetID="10" presetClass="entr" presetSubtype="0" fill="hold" nodeType="withEffect">
                                   <p:stCondLst>
-                                    <p:cond delay="900"/>
+                                    <p:cond delay="1080"/>
                                   </p:stCondLst>
                                   <p:childTnLst>
                                     <p:set>
@@ -14855,7 +15351,7 @@
                               <p:par>
                                 <p:cTn id="53" presetID="10" presetClass="entr" presetSubtype="0" fill="hold" grpId="0" nodeType="withEffect">
                                   <p:stCondLst>
-                                    <p:cond delay="900"/>
+                                    <p:cond delay="1080"/>
                                   </p:stCondLst>
                                   <p:childTnLst>
                                     <p:set>
@@ -14890,7 +15386,7 @@
                               <p:par>
                                 <p:cTn id="56" presetID="10" presetClass="entr" presetSubtype="0" fill="hold" grpId="0" nodeType="withEffect">
                                   <p:stCondLst>
-                                    <p:cond delay="900"/>
+                                    <p:cond delay="1080"/>
                                   </p:stCondLst>
                                   <p:childTnLst>
                                     <p:set>
@@ -14923,9 +15419,9 @@
                                 </p:cTn>
                               </p:par>
                               <p:par>
-                                <p:cTn id="59" presetID="10" presetClass="entr" presetSubtype="0" fill="hold" nodeType="withEffect">
-                                  <p:stCondLst>
-                                    <p:cond delay="900"/>
+                                <p:cTn id="59" presetID="10" presetClass="entr" presetSubtype="0" fill="hold" grpId="0" nodeType="withEffect">
+                                  <p:stCondLst>
+                                    <p:cond delay="1080"/>
                                   </p:stCondLst>
                                   <p:childTnLst>
                                     <p:set>
@@ -14960,7 +15456,7 @@
                               <p:par>
                                 <p:cTn id="62" presetID="10" presetClass="entr" presetSubtype="0" fill="hold" nodeType="withEffect">
                                   <p:stCondLst>
-                                    <p:cond delay="900"/>
+                                    <p:cond delay="1080"/>
                                   </p:stCondLst>
                                   <p:childTnLst>
                                     <p:set>
@@ -14995,7 +15491,7 @@
                               <p:par>
                                 <p:cTn id="65" presetID="10" presetClass="entr" presetSubtype="0" fill="hold" grpId="0" nodeType="withEffect">
                                   <p:stCondLst>
-                                    <p:cond delay="900"/>
+                                    <p:cond delay="1080"/>
                                   </p:stCondLst>
                                   <p:childTnLst>
                                     <p:set>
@@ -15030,7 +15526,7 @@
                               <p:par>
                                 <p:cTn id="68" presetID="10" presetClass="entr" presetSubtype="0" fill="hold" grpId="0" nodeType="withEffect">
                                   <p:stCondLst>
-                                    <p:cond delay="900"/>
+                                    <p:cond delay="1080"/>
                                   </p:stCondLst>
                                   <p:childTnLst>
                                     <p:set>
@@ -15065,7 +15561,7 @@
                               <p:par>
                                 <p:cTn id="71" presetID="10" presetClass="entr" presetSubtype="0" fill="hold" grpId="0" nodeType="withEffect">
                                   <p:stCondLst>
-                                    <p:cond delay="900"/>
+                                    <p:cond delay="1080"/>
                                   </p:stCondLst>
                                   <p:childTnLst>
                                     <p:set>
@@ -15127,15 +15623,20 @@
     <p:bldLst>
       <p:bldP spid="2" grpId="0" animBg="1"/>
       <p:bldP spid="3" grpId="0" animBg="1"/>
+      <p:bldP spid="4" grpId="0" animBg="1"/>
       <p:bldP spid="5" grpId="0" animBg="1"/>
       <p:bldP spid="6" grpId="0" animBg="1"/>
       <p:bldP spid="7" grpId="0" animBg="1"/>
+      <p:bldP spid="8" grpId="0" animBg="1"/>
       <p:bldP spid="10" grpId="0" animBg="1"/>
       <p:bldP spid="11" grpId="0" animBg="1"/>
+      <p:bldP spid="12" grpId="0" animBg="1"/>
       <p:bldP spid="14" grpId="0" animBg="1"/>
       <p:bldP spid="15" grpId="0" animBg="1"/>
+      <p:bldP spid="16" grpId="0" animBg="1"/>
       <p:bldP spid="18" grpId="0" animBg="1"/>
       <p:bldP spid="19" grpId="0" animBg="1"/>
+      <p:bldP spid="20" grpId="0" animBg="1"/>
       <p:bldP spid="22" grpId="0" animBg="1"/>
       <p:bldP spid="23" grpId="0" animBg="1"/>
       <p:bldP spid="24" grpId="0" animBg="1"/>
@@ -15286,6 +15787,13 @@
             </a:outerShdw>
           </a:effectLst>
         </p:spPr>
+        <p:txBody>
+          <a:bodyPr/>
+          <a:lstStyle/>
+          <a:p>
+            <a:endParaRPr lang="en-IN"/>
+          </a:p>
+        </p:txBody>
       </p:sp>
       <p:graphicFrame>
         <p:nvGraphicFramePr>
@@ -15336,6 +15844,13 @@
             </a:outerShdw>
           </a:effectLst>
         </p:spPr>
+        <p:txBody>
+          <a:bodyPr/>
+          <a:lstStyle/>
+          <a:p>
+            <a:endParaRPr lang="en-IN"/>
+          </a:p>
+        </p:txBody>
       </p:sp>
       <p:sp>
         <p:nvSpPr>
@@ -15603,9 +16118,26 @@
   <p:clrMapOvr>
     <a:masterClrMapping/>
   </p:clrMapOvr>
-  <p:transition spd="slow">
-    <p:fade/>
-  </p:transition>
+  <mc:AlternateContent xmlns:mc="http://schemas.openxmlformats.org/markup-compatibility/2006" xmlns:p14="http://schemas.microsoft.com/office/powerpoint/2010/main">
+    <mc:Choice Requires="p14">
+      <p:transition spd="slow" p14:dur="1200">
+        <p:extLst>
+          <p:ext uri="{EAC30AE4-FB1A-49FA-B60E-2F6A631AC59A}">
+            <p14:morph xmlns="" p14:option="byObject"/>
+          </p:ext>
+        </p:extLst>
+      </p:transition>
+    </mc:Choice>
+    <mc:Fallback xmlns="">
+      <p:transition spd="slow">
+        <p:extLst>
+          <p:ext uri="{EAC30AE4-FB1A-49FA-B60E-2F6A631AC59A}">
+            <p14:morph xmlns:p14="http://schemas.microsoft.com/office/powerpoint/2010/main" xmlns="" p14:option="byObject"/>
+          </p:ext>
+        </p:extLst>
+      </p:transition>
+    </mc:Fallback>
+  </mc:AlternateContent>
   <p:timing>
     <p:tnLst>
       <p:par>
@@ -15667,7 +16199,7 @@
                               <p:par>
                                 <p:cTn id="8" presetID="10" presetClass="entr" presetSubtype="0" fill="hold" grpId="0" nodeType="withEffect">
                                   <p:stCondLst>
-                                    <p:cond delay="100"/>
+                                    <p:cond delay="120"/>
                                   </p:stCondLst>
                                   <p:childTnLst>
                                     <p:set>
@@ -15700,9 +16232,9 @@
                                 </p:cTn>
                               </p:par>
                               <p:par>
-                                <p:cTn id="11" presetID="10" presetClass="entr" presetSubtype="0" fill="hold" nodeType="withEffect">
-                                  <p:stCondLst>
-                                    <p:cond delay="200"/>
+                                <p:cTn id="11" presetID="10" presetClass="entr" presetSubtype="0" fill="hold" grpId="0" nodeType="withEffect">
+                                  <p:stCondLst>
+                                    <p:cond delay="240"/>
                                   </p:stCondLst>
                                   <p:childTnLst>
                                     <p:set>
@@ -15737,7 +16269,7 @@
                               <p:par>
                                 <p:cTn id="14" presetID="10" presetClass="entr" presetSubtype="0" fill="hold" grpId="0" nodeType="withEffect">
                                   <p:stCondLst>
-                                    <p:cond delay="300"/>
+                                    <p:cond delay="360"/>
                                   </p:stCondLst>
                                   <p:childTnLst>
                                     <p:set>
@@ -15770,9 +16302,9 @@
                                 </p:cTn>
                               </p:par>
                               <p:par>
-                                <p:cTn id="17" presetID="10" presetClass="entr" presetSubtype="0" fill="hold" nodeType="withEffect">
-                                  <p:stCondLst>
-                                    <p:cond delay="400"/>
+                                <p:cTn id="17" presetID="10" presetClass="entr" presetSubtype="0" fill="hold" grpId="0" nodeType="withEffect">
+                                  <p:stCondLst>
+                                    <p:cond delay="480"/>
                                   </p:stCondLst>
                                   <p:childTnLst>
                                     <p:set>
@@ -15807,7 +16339,7 @@
                               <p:par>
                                 <p:cTn id="20" presetID="10" presetClass="entr" presetSubtype="0" fill="hold" grpId="0" nodeType="withEffect">
                                   <p:stCondLst>
-                                    <p:cond delay="500"/>
+                                    <p:cond delay="600"/>
                                   </p:stCondLst>
                                   <p:childTnLst>
                                     <p:set>
@@ -15842,7 +16374,7 @@
                               <p:par>
                                 <p:cTn id="23" presetID="10" presetClass="entr" presetSubtype="0" fill="hold" grpId="0" nodeType="withEffect">
                                   <p:stCondLst>
-                                    <p:cond delay="600"/>
+                                    <p:cond delay="720"/>
                                   </p:stCondLst>
                                   <p:childTnLst>
                                     <p:set>
@@ -15877,7 +16409,7 @@
                               <p:par>
                                 <p:cTn id="26" presetID="10" presetClass="entr" presetSubtype="0" fill="hold" grpId="0" nodeType="withEffect">
                                   <p:stCondLst>
-                                    <p:cond delay="700"/>
+                                    <p:cond delay="840"/>
                                   </p:stCondLst>
                                   <p:childTnLst>
                                     <p:set>
@@ -15939,9 +16471,11 @@
     <p:bldLst>
       <p:bldP spid="2" grpId="0" animBg="1"/>
       <p:bldP spid="3" grpId="0" animBg="1"/>
+      <p:bldP spid="4" grpId="0" animBg="1"/>
       <p:bldGraphic spid="5" grpId="0">
         <p:bldAsOne/>
       </p:bldGraphic>
+      <p:bldP spid="6" grpId="0" animBg="1"/>
       <p:bldP spid="7" grpId="0" animBg="1"/>
       <p:bldP spid="8" grpId="0" animBg="1"/>
       <p:bldP spid="9" grpId="0" animBg="1"/>
@@ -16092,6 +16626,13 @@
             </a:outerShdw>
           </a:effectLst>
         </p:spPr>
+        <p:txBody>
+          <a:bodyPr/>
+          <a:lstStyle/>
+          <a:p>
+            <a:endParaRPr lang="en-IN"/>
+          </a:p>
+        </p:txBody>
       </p:sp>
       <p:sp>
         <p:nvSpPr>
@@ -16119,6 +16660,13 @@
             <a:prstDash val="solid"/>
           </a:ln>
         </p:spPr>
+        <p:txBody>
+          <a:bodyPr/>
+          <a:lstStyle/>
+          <a:p>
+            <a:endParaRPr lang="en-IN"/>
+          </a:p>
+        </p:txBody>
       </p:sp>
       <p:pic>
         <p:nvPicPr>
@@ -16261,6 +16809,13 @@
             </a:outerShdw>
           </a:effectLst>
         </p:spPr>
+        <p:txBody>
+          <a:bodyPr/>
+          <a:lstStyle/>
+          <a:p>
+            <a:endParaRPr lang="en-IN"/>
+          </a:p>
+        </p:txBody>
       </p:sp>
       <p:sp>
         <p:nvSpPr>
@@ -16288,6 +16843,13 @@
             <a:prstDash val="solid"/>
           </a:ln>
         </p:spPr>
+        <p:txBody>
+          <a:bodyPr/>
+          <a:lstStyle/>
+          <a:p>
+            <a:endParaRPr lang="en-IN"/>
+          </a:p>
+        </p:txBody>
       </p:sp>
       <p:pic>
         <p:nvPicPr>
@@ -16430,6 +16992,13 @@
             </a:outerShdw>
           </a:effectLst>
         </p:spPr>
+        <p:txBody>
+          <a:bodyPr/>
+          <a:lstStyle/>
+          <a:p>
+            <a:endParaRPr lang="en-IN"/>
+          </a:p>
+        </p:txBody>
       </p:sp>
       <p:sp>
         <p:nvSpPr>
@@ -16457,6 +17026,13 @@
             <a:prstDash val="solid"/>
           </a:ln>
         </p:spPr>
+        <p:txBody>
+          <a:bodyPr/>
+          <a:lstStyle/>
+          <a:p>
+            <a:endParaRPr lang="en-IN"/>
+          </a:p>
+        </p:txBody>
       </p:sp>
       <p:pic>
         <p:nvPicPr>
@@ -16688,9 +17264,26 @@
   <p:clrMapOvr>
     <a:masterClrMapping/>
   </p:clrMapOvr>
-  <p:transition spd="slow">
-    <p:fade/>
-  </p:transition>
+  <mc:AlternateContent xmlns:mc="http://schemas.openxmlformats.org/markup-compatibility/2006" xmlns:p14="http://schemas.microsoft.com/office/powerpoint/2010/main">
+    <mc:Choice Requires="p14">
+      <p:transition spd="slow" p14:dur="1200">
+        <p:extLst>
+          <p:ext uri="{EAC30AE4-FB1A-49FA-B60E-2F6A631AC59A}">
+            <p14:morph xmlns="" p14:option="byObject"/>
+          </p:ext>
+        </p:extLst>
+      </p:transition>
+    </mc:Choice>
+    <mc:Fallback xmlns="">
+      <p:transition spd="slow">
+        <p:extLst>
+          <p:ext uri="{EAC30AE4-FB1A-49FA-B60E-2F6A631AC59A}">
+            <p14:morph xmlns:p14="http://schemas.microsoft.com/office/powerpoint/2010/main" xmlns="" p14:option="byObject"/>
+          </p:ext>
+        </p:extLst>
+      </p:transition>
+    </mc:Fallback>
+  </mc:AlternateContent>
   <p:timing>
     <p:tnLst>
       <p:par>
@@ -16752,7 +17345,7 @@
                               <p:par>
                                 <p:cTn id="8" presetID="10" presetClass="entr" presetSubtype="0" fill="hold" grpId="0" nodeType="withEffect">
                                   <p:stCondLst>
-                                    <p:cond delay="100"/>
+                                    <p:cond delay="120"/>
                                   </p:stCondLst>
                                   <p:childTnLst>
                                     <p:set>
@@ -16785,9 +17378,9 @@
                                 </p:cTn>
                               </p:par>
                               <p:par>
-                                <p:cTn id="11" presetID="10" presetClass="entr" presetSubtype="0" fill="hold" nodeType="withEffect">
-                                  <p:stCondLst>
-                                    <p:cond delay="200"/>
+                                <p:cTn id="11" presetID="10" presetClass="entr" presetSubtype="0" fill="hold" grpId="0" nodeType="withEffect">
+                                  <p:stCondLst>
+                                    <p:cond delay="240"/>
                                   </p:stCondLst>
                                   <p:childTnLst>
                                     <p:set>
@@ -16820,9 +17413,9 @@
                                 </p:cTn>
                               </p:par>
                               <p:par>
-                                <p:cTn id="14" presetID="10" presetClass="entr" presetSubtype="0" fill="hold" nodeType="withEffect">
-                                  <p:stCondLst>
-                                    <p:cond delay="300"/>
+                                <p:cTn id="14" presetID="10" presetClass="entr" presetSubtype="0" fill="hold" grpId="0" nodeType="withEffect">
+                                  <p:stCondLst>
+                                    <p:cond delay="360"/>
                                   </p:stCondLst>
                                   <p:childTnLst>
                                     <p:set>
@@ -16857,7 +17450,7 @@
                               <p:par>
                                 <p:cTn id="17" presetID="10" presetClass="entr" presetSubtype="0" fill="hold" nodeType="withEffect">
                                   <p:stCondLst>
-                                    <p:cond delay="400"/>
+                                    <p:cond delay="480"/>
                                   </p:stCondLst>
                                   <p:childTnLst>
                                     <p:set>
@@ -16892,7 +17485,7 @@
                               <p:par>
                                 <p:cTn id="20" presetID="10" presetClass="entr" presetSubtype="0" fill="hold" grpId="0" nodeType="withEffect">
                                   <p:stCondLst>
-                                    <p:cond delay="500"/>
+                                    <p:cond delay="600"/>
                                   </p:stCondLst>
                                   <p:childTnLst>
                                     <p:set>
@@ -16927,7 +17520,7 @@
                               <p:par>
                                 <p:cTn id="23" presetID="10" presetClass="entr" presetSubtype="0" fill="hold" grpId="0" nodeType="withEffect">
                                   <p:stCondLst>
-                                    <p:cond delay="600"/>
+                                    <p:cond delay="720"/>
                                   </p:stCondLst>
                                   <p:childTnLst>
                                     <p:set>
@@ -16960,9 +17553,9 @@
                                 </p:cTn>
                               </p:par>
                               <p:par>
-                                <p:cTn id="26" presetID="10" presetClass="entr" presetSubtype="0" fill="hold" nodeType="withEffect">
-                                  <p:stCondLst>
-                                    <p:cond delay="700"/>
+                                <p:cTn id="26" presetID="10" presetClass="entr" presetSubtype="0" fill="hold" grpId="0" nodeType="withEffect">
+                                  <p:stCondLst>
+                                    <p:cond delay="840"/>
                                   </p:stCondLst>
                                   <p:childTnLst>
                                     <p:set>
@@ -16995,9 +17588,9 @@
                                 </p:cTn>
                               </p:par>
                               <p:par>
-                                <p:cTn id="29" presetID="10" presetClass="entr" presetSubtype="0" fill="hold" nodeType="withEffect">
-                                  <p:stCondLst>
-                                    <p:cond delay="800"/>
+                                <p:cTn id="29" presetID="10" presetClass="entr" presetSubtype="0" fill="hold" grpId="0" nodeType="withEffect">
+                                  <p:stCondLst>
+                                    <p:cond delay="960"/>
                                   </p:stCondLst>
                                   <p:childTnLst>
                                     <p:set>
@@ -17032,7 +17625,7 @@
                               <p:par>
                                 <p:cTn id="32" presetID="10" presetClass="entr" presetSubtype="0" fill="hold" nodeType="withEffect">
                                   <p:stCondLst>
-                                    <p:cond delay="900"/>
+                                    <p:cond delay="1080"/>
                                   </p:stCondLst>
                                   <p:childTnLst>
                                     <p:set>
@@ -17067,7 +17660,7 @@
                               <p:par>
                                 <p:cTn id="35" presetID="10" presetClass="entr" presetSubtype="0" fill="hold" grpId="0" nodeType="withEffect">
                                   <p:stCondLst>
-                                    <p:cond delay="900"/>
+                                    <p:cond delay="1080"/>
                                   </p:stCondLst>
                                   <p:childTnLst>
                                     <p:set>
@@ -17102,7 +17695,7 @@
                               <p:par>
                                 <p:cTn id="38" presetID="10" presetClass="entr" presetSubtype="0" fill="hold" grpId="0" nodeType="withEffect">
                                   <p:stCondLst>
-                                    <p:cond delay="900"/>
+                                    <p:cond delay="1080"/>
                                   </p:stCondLst>
                                   <p:childTnLst>
                                     <p:set>
@@ -17135,9 +17728,9 @@
                                 </p:cTn>
                               </p:par>
                               <p:par>
-                                <p:cTn id="41" presetID="10" presetClass="entr" presetSubtype="0" fill="hold" nodeType="withEffect">
-                                  <p:stCondLst>
-                                    <p:cond delay="900"/>
+                                <p:cTn id="41" presetID="10" presetClass="entr" presetSubtype="0" fill="hold" grpId="0" nodeType="withEffect">
+                                  <p:stCondLst>
+                                    <p:cond delay="1080"/>
                                   </p:stCondLst>
                                   <p:childTnLst>
                                     <p:set>
@@ -17170,9 +17763,9 @@
                                 </p:cTn>
                               </p:par>
                               <p:par>
-                                <p:cTn id="44" presetID="10" presetClass="entr" presetSubtype="0" fill="hold" nodeType="withEffect">
-                                  <p:stCondLst>
-                                    <p:cond delay="900"/>
+                                <p:cTn id="44" presetID="10" presetClass="entr" presetSubtype="0" fill="hold" grpId="0" nodeType="withEffect">
+                                  <p:stCondLst>
+                                    <p:cond delay="1080"/>
                                   </p:stCondLst>
                                   <p:childTnLst>
                                     <p:set>
@@ -17207,7 +17800,7 @@
                               <p:par>
                                 <p:cTn id="47" presetID="10" presetClass="entr" presetSubtype="0" fill="hold" nodeType="withEffect">
                                   <p:stCondLst>
-                                    <p:cond delay="900"/>
+                                    <p:cond delay="1080"/>
                                   </p:stCondLst>
                                   <p:childTnLst>
                                     <p:set>
@@ -17242,7 +17835,7 @@
                               <p:par>
                                 <p:cTn id="50" presetID="10" presetClass="entr" presetSubtype="0" fill="hold" grpId="0" nodeType="withEffect">
                                   <p:stCondLst>
-                                    <p:cond delay="900"/>
+                                    <p:cond delay="1080"/>
                                   </p:stCondLst>
                                   <p:childTnLst>
                                     <p:set>
@@ -17277,7 +17870,7 @@
                               <p:par>
                                 <p:cTn id="53" presetID="10" presetClass="entr" presetSubtype="0" fill="hold" grpId="0" nodeType="withEffect">
                                   <p:stCondLst>
-                                    <p:cond delay="900"/>
+                                    <p:cond delay="1080"/>
                                   </p:stCondLst>
                                   <p:childTnLst>
                                     <p:set>
@@ -17312,7 +17905,7 @@
                               <p:par>
                                 <p:cTn id="56" presetID="10" presetClass="entr" presetSubtype="0" fill="hold" grpId="0" nodeType="withEffect">
                                   <p:stCondLst>
-                                    <p:cond delay="900"/>
+                                    <p:cond delay="1080"/>
                                   </p:stCondLst>
                                   <p:childTnLst>
                                     <p:set>
@@ -17374,10 +17967,16 @@
     <p:bldLst>
       <p:bldP spid="2" grpId="0" animBg="1"/>
       <p:bldP spid="3" grpId="0" animBg="1"/>
+      <p:bldP spid="4" grpId="0" animBg="1"/>
+      <p:bldP spid="5" grpId="0" animBg="1"/>
       <p:bldP spid="7" grpId="0" animBg="1"/>
       <p:bldP spid="8" grpId="0" animBg="1"/>
+      <p:bldP spid="9" grpId="0" animBg="1"/>
+      <p:bldP spid="10" grpId="0" animBg="1"/>
       <p:bldP spid="12" grpId="0" animBg="1"/>
       <p:bldP spid="13" grpId="0" animBg="1"/>
+      <p:bldP spid="14" grpId="0" animBg="1"/>
+      <p:bldP spid="15" grpId="0" animBg="1"/>
       <p:bldP spid="17" grpId="0" animBg="1"/>
       <p:bldP spid="18" grpId="0" animBg="1"/>
       <p:bldP spid="19" grpId="0" animBg="1"/>
@@ -17443,6 +18042,13 @@
             <a:prstDash val="solid"/>
           </a:ln>
         </p:spPr>
+        <p:txBody>
+          <a:bodyPr/>
+          <a:lstStyle/>
+          <a:p>
+            <a:endParaRPr lang="en-IN"/>
+          </a:p>
+        </p:txBody>
       </p:sp>
       <p:pic>
         <p:nvPicPr>
@@ -17652,9 +18258,26 @@
   <p:clrMapOvr>
     <a:masterClrMapping/>
   </p:clrMapOvr>
-  <p:transition spd="slow">
-    <p:fade/>
-  </p:transition>
+  <mc:AlternateContent xmlns:mc="http://schemas.openxmlformats.org/markup-compatibility/2006" xmlns:p14="http://schemas.microsoft.com/office/powerpoint/2010/main">
+    <mc:Choice Requires="p14">
+      <p:transition spd="slow" p14:dur="1200">
+        <p:extLst>
+          <p:ext uri="{EAC30AE4-FB1A-49FA-B60E-2F6A631AC59A}">
+            <p14:morph xmlns="" p14:option="byObject"/>
+          </p:ext>
+        </p:extLst>
+      </p:transition>
+    </mc:Choice>
+    <mc:Fallback xmlns="">
+      <p:transition spd="slow">
+        <p:extLst>
+          <p:ext uri="{EAC30AE4-FB1A-49FA-B60E-2F6A631AC59A}">
+            <p14:morph xmlns:p14="http://schemas.microsoft.com/office/powerpoint/2010/main" xmlns="" p14:option="byObject"/>
+          </p:ext>
+        </p:extLst>
+      </p:transition>
+    </mc:Fallback>
+  </mc:AlternateContent>
   <p:timing>
     <p:tnLst>
       <p:par>
@@ -17679,7 +18302,7 @@
                             </p:stCondLst>
                             <p:childTnLst>
                               <p:par>
-                                <p:cTn id="5" presetID="10" presetClass="entr" presetSubtype="0" fill="hold" nodeType="withEffect">
+                                <p:cTn id="5" presetID="10" presetClass="entr" presetSubtype="0" fill="hold" grpId="0" nodeType="withEffect">
                                   <p:stCondLst>
                                     <p:cond delay="0"/>
                                   </p:stCondLst>
@@ -17716,7 +18339,7 @@
                               <p:par>
                                 <p:cTn id="8" presetID="10" presetClass="entr" presetSubtype="0" fill="hold" nodeType="withEffect">
                                   <p:stCondLst>
-                                    <p:cond delay="100"/>
+                                    <p:cond delay="120"/>
                                   </p:stCondLst>
                                   <p:childTnLst>
                                     <p:set>
@@ -17751,7 +18374,7 @@
                               <p:par>
                                 <p:cTn id="11" presetID="10" presetClass="entr" presetSubtype="0" fill="hold" grpId="0" nodeType="withEffect">
                                   <p:stCondLst>
-                                    <p:cond delay="200"/>
+                                    <p:cond delay="240"/>
                                   </p:stCondLst>
                                   <p:childTnLst>
                                     <p:set>
@@ -17786,7 +18409,7 @@
                               <p:par>
                                 <p:cTn id="14" presetID="10" presetClass="entr" presetSubtype="0" fill="hold" grpId="0" nodeType="withEffect">
                                   <p:stCondLst>
-                                    <p:cond delay="300"/>
+                                    <p:cond delay="360"/>
                                   </p:stCondLst>
                                   <p:childTnLst>
                                     <p:set>
@@ -17821,7 +18444,7 @@
                               <p:par>
                                 <p:cTn id="17" presetID="10" presetClass="entr" presetSubtype="0" fill="hold" grpId="0" nodeType="withEffect">
                                   <p:stCondLst>
-                                    <p:cond delay="400"/>
+                                    <p:cond delay="480"/>
                                   </p:stCondLst>
                                   <p:childTnLst>
                                     <p:set>
@@ -17856,7 +18479,7 @@
                               <p:par>
                                 <p:cTn id="20" presetID="10" presetClass="entr" presetSubtype="0" fill="hold" grpId="0" nodeType="withEffect">
                                   <p:stCondLst>
-                                    <p:cond delay="500"/>
+                                    <p:cond delay="600"/>
                                   </p:stCondLst>
                                   <p:childTnLst>
                                     <p:set>
@@ -17916,6 +18539,7 @@
       </p:par>
     </p:tnLst>
     <p:bldLst>
+      <p:bldP spid="2" grpId="0" animBg="1"/>
       <p:bldP spid="4" grpId="0" animBg="1"/>
       <p:bldP spid="5" grpId="0" animBg="1"/>
       <p:bldP spid="6" grpId="0" animBg="1"/>
@@ -18130,6 +18754,13 @@
             </a:outerShdw>
           </a:effectLst>
         </p:spPr>
+        <p:txBody>
+          <a:bodyPr/>
+          <a:lstStyle/>
+          <a:p>
+            <a:endParaRPr lang="en-IN"/>
+          </a:p>
+        </p:txBody>
       </p:sp>
       <p:sp>
         <p:nvSpPr>
@@ -18157,6 +18788,13 @@
             <a:prstDash val="solid"/>
           </a:ln>
         </p:spPr>
+        <p:txBody>
+          <a:bodyPr/>
+          <a:lstStyle/>
+          <a:p>
+            <a:endParaRPr lang="en-IN"/>
+          </a:p>
+        </p:txBody>
       </p:sp>
       <p:pic>
         <p:nvPicPr>
@@ -18296,6 +18934,13 @@
             </a:outerShdw>
           </a:effectLst>
         </p:spPr>
+        <p:txBody>
+          <a:bodyPr/>
+          <a:lstStyle/>
+          <a:p>
+            <a:endParaRPr lang="en-IN"/>
+          </a:p>
+        </p:txBody>
       </p:sp>
       <p:sp>
         <p:nvSpPr>
@@ -18323,6 +18968,13 @@
             <a:prstDash val="solid"/>
           </a:ln>
         </p:spPr>
+        <p:txBody>
+          <a:bodyPr/>
+          <a:lstStyle/>
+          <a:p>
+            <a:endParaRPr lang="en-IN"/>
+          </a:p>
+        </p:txBody>
       </p:sp>
       <p:pic>
         <p:nvPicPr>
@@ -18462,6 +19114,13 @@
             </a:outerShdw>
           </a:effectLst>
         </p:spPr>
+        <p:txBody>
+          <a:bodyPr/>
+          <a:lstStyle/>
+          <a:p>
+            <a:endParaRPr lang="en-IN"/>
+          </a:p>
+        </p:txBody>
       </p:sp>
       <p:sp>
         <p:nvSpPr>
@@ -18489,6 +19148,13 @@
             <a:prstDash val="solid"/>
           </a:ln>
         </p:spPr>
+        <p:txBody>
+          <a:bodyPr/>
+          <a:lstStyle/>
+          <a:p>
+            <a:endParaRPr lang="en-IN"/>
+          </a:p>
+        </p:txBody>
       </p:sp>
       <p:pic>
         <p:nvPicPr>
@@ -18678,9 +19344,26 @@
   <p:clrMapOvr>
     <a:masterClrMapping/>
   </p:clrMapOvr>
-  <p:transition spd="slow">
-    <p:fade/>
-  </p:transition>
+  <mc:AlternateContent xmlns:mc="http://schemas.openxmlformats.org/markup-compatibility/2006" xmlns:p14="http://schemas.microsoft.com/office/powerpoint/2010/main">
+    <mc:Choice Requires="p14">
+      <p:transition spd="slow" p14:dur="1200">
+        <p:extLst>
+          <p:ext uri="{EAC30AE4-FB1A-49FA-B60E-2F6A631AC59A}">
+            <p14:morph xmlns="" p14:option="byObject"/>
+          </p:ext>
+        </p:extLst>
+      </p:transition>
+    </mc:Choice>
+    <mc:Fallback xmlns="">
+      <p:transition spd="slow">
+        <p:extLst>
+          <p:ext uri="{EAC30AE4-FB1A-49FA-B60E-2F6A631AC59A}">
+            <p14:morph xmlns:p14="http://schemas.microsoft.com/office/powerpoint/2010/main" xmlns="" p14:option="byObject"/>
+          </p:ext>
+        </p:extLst>
+      </p:transition>
+    </mc:Fallback>
+  </mc:AlternateContent>
   <p:timing>
     <p:tnLst>
       <p:par>
@@ -18742,7 +19425,7 @@
                               <p:par>
                                 <p:cTn id="8" presetID="10" presetClass="entr" presetSubtype="0" fill="hold" nodeType="withEffect">
                                   <p:stCondLst>
-                                    <p:cond delay="100"/>
+                                    <p:cond delay="120"/>
                                   </p:stCondLst>
                                   <p:childTnLst>
                                     <p:set>
@@ -18777,7 +19460,7 @@
                               <p:par>
                                 <p:cTn id="11" presetID="10" presetClass="entr" presetSubtype="0" fill="hold" grpId="0" nodeType="withEffect">
                                   <p:stCondLst>
-                                    <p:cond delay="200"/>
+                                    <p:cond delay="240"/>
                                   </p:stCondLst>
                                   <p:childTnLst>
                                     <p:set>
@@ -18812,7 +19495,7 @@
                               <p:par>
                                 <p:cTn id="14" presetID="10" presetClass="entr" presetSubtype="0" fill="hold" grpId="0" nodeType="withEffect">
                                   <p:stCondLst>
-                                    <p:cond delay="300"/>
+                                    <p:cond delay="360"/>
                                   </p:stCondLst>
                                   <p:childTnLst>
                                     <p:set>
@@ -18845,9 +19528,9 @@
                                 </p:cTn>
                               </p:par>
                               <p:par>
-                                <p:cTn id="17" presetID="10" presetClass="entr" presetSubtype="0" fill="hold" nodeType="withEffect">
-                                  <p:stCondLst>
-                                    <p:cond delay="400"/>
+                                <p:cTn id="17" presetID="10" presetClass="entr" presetSubtype="0" fill="hold" grpId="0" nodeType="withEffect">
+                                  <p:stCondLst>
+                                    <p:cond delay="480"/>
                                   </p:stCondLst>
                                   <p:childTnLst>
                                     <p:set>
@@ -18880,9 +19563,9 @@
                                 </p:cTn>
                               </p:par>
                               <p:par>
-                                <p:cTn id="20" presetID="10" presetClass="entr" presetSubtype="0" fill="hold" nodeType="withEffect">
-                                  <p:stCondLst>
-                                    <p:cond delay="500"/>
+                                <p:cTn id="20" presetID="10" presetClass="entr" presetSubtype="0" fill="hold" grpId="0" nodeType="withEffect">
+                                  <p:stCondLst>
+                                    <p:cond delay="600"/>
                                   </p:stCondLst>
                                   <p:childTnLst>
                                     <p:set>
@@ -18917,7 +19600,7 @@
                               <p:par>
                                 <p:cTn id="23" presetID="10" presetClass="entr" presetSubtype="0" fill="hold" nodeType="withEffect">
                                   <p:stCondLst>
-                                    <p:cond delay="600"/>
+                                    <p:cond delay="720"/>
                                   </p:stCondLst>
                                   <p:childTnLst>
                                     <p:set>
@@ -18952,7 +19635,7 @@
                               <p:par>
                                 <p:cTn id="26" presetID="10" presetClass="entr" presetSubtype="0" fill="hold" grpId="0" nodeType="withEffect">
                                   <p:stCondLst>
-                                    <p:cond delay="700"/>
+                                    <p:cond delay="840"/>
                                   </p:stCondLst>
                                   <p:childTnLst>
                                     <p:set>
@@ -18987,7 +19670,7 @@
                               <p:par>
                                 <p:cTn id="29" presetID="10" presetClass="entr" presetSubtype="0" fill="hold" grpId="0" nodeType="withEffect">
                                   <p:stCondLst>
-                                    <p:cond delay="800"/>
+                                    <p:cond delay="960"/>
                                   </p:stCondLst>
                                   <p:childTnLst>
                                     <p:set>
@@ -19020,9 +19703,9 @@
                                 </p:cTn>
                               </p:par>
                               <p:par>
-                                <p:cTn id="32" presetID="10" presetClass="entr" presetSubtype="0" fill="hold" nodeType="withEffect">
-                                  <p:stCondLst>
-                                    <p:cond delay="900"/>
+                                <p:cTn id="32" presetID="10" presetClass="entr" presetSubtype="0" fill="hold" grpId="0" nodeType="withEffect">
+                                  <p:stCondLst>
+                                    <p:cond delay="1080"/>
                                   </p:stCondLst>
                                   <p:childTnLst>
                                     <p:set>
@@ -19055,9 +19738,9 @@
                                 </p:cTn>
                               </p:par>
                               <p:par>
-                                <p:cTn id="35" presetID="10" presetClass="entr" presetSubtype="0" fill="hold" nodeType="withEffect">
-                                  <p:stCondLst>
-                                    <p:cond delay="900"/>
+                                <p:cTn id="35" presetID="10" presetClass="entr" presetSubtype="0" fill="hold" grpId="0" nodeType="withEffect">
+                                  <p:stCondLst>
+                                    <p:cond delay="1080"/>
                                   </p:stCondLst>
                                   <p:childTnLst>
                                     <p:set>
@@ -19092,7 +19775,7 @@
                               <p:par>
                                 <p:cTn id="38" presetID="10" presetClass="entr" presetSubtype="0" fill="hold" nodeType="withEffect">
                                   <p:stCondLst>
-                                    <p:cond delay="900"/>
+                                    <p:cond delay="1080"/>
                                   </p:stCondLst>
                                   <p:childTnLst>
                                     <p:set>
@@ -19127,7 +19810,7 @@
                               <p:par>
                                 <p:cTn id="41" presetID="10" presetClass="entr" presetSubtype="0" fill="hold" grpId="0" nodeType="withEffect">
                                   <p:stCondLst>
-                                    <p:cond delay="900"/>
+                                    <p:cond delay="1080"/>
                                   </p:stCondLst>
                                   <p:childTnLst>
                                     <p:set>
@@ -19162,7 +19845,7 @@
                               <p:par>
                                 <p:cTn id="44" presetID="10" presetClass="entr" presetSubtype="0" fill="hold" grpId="0" nodeType="withEffect">
                                   <p:stCondLst>
-                                    <p:cond delay="900"/>
+                                    <p:cond delay="1080"/>
                                   </p:stCondLst>
                                   <p:childTnLst>
                                     <p:set>
@@ -19195,9 +19878,9 @@
                                 </p:cTn>
                               </p:par>
                               <p:par>
-                                <p:cTn id="47" presetID="10" presetClass="entr" presetSubtype="0" fill="hold" nodeType="withEffect">
-                                  <p:stCondLst>
-                                    <p:cond delay="900"/>
+                                <p:cTn id="47" presetID="10" presetClass="entr" presetSubtype="0" fill="hold" grpId="0" nodeType="withEffect">
+                                  <p:stCondLst>
+                                    <p:cond delay="1080"/>
                                   </p:stCondLst>
                                   <p:childTnLst>
                                     <p:set>
@@ -19230,9 +19913,9 @@
                                 </p:cTn>
                               </p:par>
                               <p:par>
-                                <p:cTn id="50" presetID="10" presetClass="entr" presetSubtype="0" fill="hold" nodeType="withEffect">
-                                  <p:stCondLst>
-                                    <p:cond delay="900"/>
+                                <p:cTn id="50" presetID="10" presetClass="entr" presetSubtype="0" fill="hold" grpId="0" nodeType="withEffect">
+                                  <p:stCondLst>
+                                    <p:cond delay="1080"/>
                                   </p:stCondLst>
                                   <p:childTnLst>
                                     <p:set>
@@ -19267,7 +19950,7 @@
                               <p:par>
                                 <p:cTn id="53" presetID="10" presetClass="entr" presetSubtype="0" fill="hold" nodeType="withEffect">
                                   <p:stCondLst>
-                                    <p:cond delay="900"/>
+                                    <p:cond delay="1080"/>
                                   </p:stCondLst>
                                   <p:childTnLst>
                                     <p:set>
@@ -19302,7 +19985,7 @@
                               <p:par>
                                 <p:cTn id="56" presetID="10" presetClass="entr" presetSubtype="0" fill="hold" grpId="0" nodeType="withEffect">
                                   <p:stCondLst>
-                                    <p:cond delay="900"/>
+                                    <p:cond delay="1080"/>
                                   </p:stCondLst>
                                   <p:childTnLst>
                                     <p:set>
@@ -19337,7 +20020,7 @@
                               <p:par>
                                 <p:cTn id="59" presetID="10" presetClass="entr" presetSubtype="0" fill="hold" grpId="0" nodeType="withEffect">
                                   <p:stCondLst>
-                                    <p:cond delay="900"/>
+                                    <p:cond delay="1080"/>
                                   </p:stCondLst>
                                   <p:childTnLst>
                                     <p:set>
@@ -19400,10 +20083,16 @@
       <p:bldP spid="2" grpId="0" animBg="1"/>
       <p:bldP spid="4" grpId="0" animBg="1"/>
       <p:bldP spid="5" grpId="0" animBg="1"/>
+      <p:bldP spid="6" grpId="0" animBg="1"/>
+      <p:bldP spid="7" grpId="0" animBg="1"/>
       <p:bldP spid="9" grpId="0" animBg="1"/>
       <p:bldP spid="10" grpId="0" animBg="1"/>
+      <p:bldP spid="11" grpId="0" animBg="1"/>
+      <p:bldP spid="12" grpId="0" animBg="1"/>
       <p:bldP spid="14" grpId="0" animBg="1"/>
       <p:bldP spid="15" grpId="0" animBg="1"/>
+      <p:bldP spid="16" grpId="0" animBg="1"/>
+      <p:bldP spid="17" grpId="0" animBg="1"/>
       <p:bldP spid="19" grpId="0" animBg="1"/>
       <p:bldP spid="20" grpId="0" animBg="1"/>
     </p:bldLst>
@@ -19660,6 +20349,13 @@
             </a:outerShdw>
           </a:effectLst>
         </p:spPr>
+        <p:txBody>
+          <a:bodyPr/>
+          <a:lstStyle/>
+          <a:p>
+            <a:endParaRPr lang="en-IN"/>
+          </a:p>
+        </p:txBody>
       </p:sp>
       <p:sp>
         <p:nvSpPr>
@@ -19687,6 +20383,13 @@
             <a:prstDash val="solid"/>
           </a:ln>
         </p:spPr>
+        <p:txBody>
+          <a:bodyPr/>
+          <a:lstStyle/>
+          <a:p>
+            <a:endParaRPr lang="en-IN"/>
+          </a:p>
+        </p:txBody>
       </p:sp>
       <p:pic>
         <p:nvPicPr>
@@ -19826,6 +20529,13 @@
             </a:outerShdw>
           </a:effectLst>
         </p:spPr>
+        <p:txBody>
+          <a:bodyPr/>
+          <a:lstStyle/>
+          <a:p>
+            <a:endParaRPr lang="en-IN"/>
+          </a:p>
+        </p:txBody>
       </p:sp>
       <p:sp>
         <p:nvSpPr>
@@ -19853,6 +20563,13 @@
             <a:prstDash val="solid"/>
           </a:ln>
         </p:spPr>
+        <p:txBody>
+          <a:bodyPr/>
+          <a:lstStyle/>
+          <a:p>
+            <a:endParaRPr lang="en-IN"/>
+          </a:p>
+        </p:txBody>
       </p:sp>
       <p:pic>
         <p:nvPicPr>
@@ -20042,9 +20759,26 @@
   <p:clrMapOvr>
     <a:masterClrMapping/>
   </p:clrMapOvr>
-  <p:transition spd="slow">
-    <p:fade/>
-  </p:transition>
+  <mc:AlternateContent xmlns:mc="http://schemas.openxmlformats.org/markup-compatibility/2006" xmlns:p14="http://schemas.microsoft.com/office/powerpoint/2010/main">
+    <mc:Choice Requires="p14">
+      <p:transition spd="slow" p14:dur="1200">
+        <p:extLst>
+          <p:ext uri="{EAC30AE4-FB1A-49FA-B60E-2F6A631AC59A}">
+            <p14:morph xmlns="" p14:option="byObject"/>
+          </p:ext>
+        </p:extLst>
+      </p:transition>
+    </mc:Choice>
+    <mc:Fallback xmlns="">
+      <p:transition spd="slow">
+        <p:extLst>
+          <p:ext uri="{EAC30AE4-FB1A-49FA-B60E-2F6A631AC59A}">
+            <p14:morph xmlns:p14="http://schemas.microsoft.com/office/powerpoint/2010/main" xmlns="" p14:option="byObject"/>
+          </p:ext>
+        </p:extLst>
+      </p:transition>
+    </mc:Fallback>
+  </mc:AlternateContent>
   <p:timing>
     <p:tnLst>
       <p:par>
@@ -20106,7 +20840,7 @@
                               <p:par>
                                 <p:cTn id="8" presetID="10" presetClass="entr" presetSubtype="0" fill="hold" grpId="0" nodeType="withEffect">
                                   <p:stCondLst>
-                                    <p:cond delay="100"/>
+                                    <p:cond delay="120"/>
                                   </p:stCondLst>
                                   <p:childTnLst>
                                     <p:set>
@@ -20141,7 +20875,7 @@
                               <p:par>
                                 <p:cTn id="11" presetID="10" presetClass="entr" presetSubtype="0" fill="hold" grpId="0" nodeType="withEffect">
                                   <p:stCondLst>
-                                    <p:cond delay="200"/>
+                                    <p:cond delay="240"/>
                                   </p:stCondLst>
                                   <p:childTnLst>
                                     <p:set>
@@ -20176,7 +20910,7 @@
                               <p:par>
                                 <p:cTn id="14" presetID="10" presetClass="entr" presetSubtype="0" fill="hold" grpId="0" nodeType="withEffect">
                                   <p:stCondLst>
-                                    <p:cond delay="300"/>
+                                    <p:cond delay="360"/>
                                   </p:stCondLst>
                                   <p:childTnLst>
                                     <p:set>
@@ -20209,9 +20943,9 @@
                                 </p:cTn>
                               </p:par>
                               <p:par>
-                                <p:cTn id="17" presetID="10" presetClass="entr" presetSubtype="0" fill="hold" nodeType="withEffect">
-                                  <p:stCondLst>
-                                    <p:cond delay="400"/>
+                                <p:cTn id="17" presetID="10" presetClass="entr" presetSubtype="0" fill="hold" grpId="0" nodeType="withEffect">
+                                  <p:stCondLst>
+                                    <p:cond delay="480"/>
                                   </p:stCondLst>
                                   <p:childTnLst>
                                     <p:set>
@@ -20244,9 +20978,9 @@
                                 </p:cTn>
                               </p:par>
                               <p:par>
-                                <p:cTn id="20" presetID="10" presetClass="entr" presetSubtype="0" fill="hold" nodeType="withEffect">
-                                  <p:stCondLst>
-                                    <p:cond delay="500"/>
+                                <p:cTn id="20" presetID="10" presetClass="entr" presetSubtype="0" fill="hold" grpId="0" nodeType="withEffect">
+                                  <p:stCondLst>
+                                    <p:cond delay="600"/>
                                   </p:stCondLst>
                                   <p:childTnLst>
                                     <p:set>
@@ -20281,7 +21015,7 @@
                               <p:par>
                                 <p:cTn id="23" presetID="10" presetClass="entr" presetSubtype="0" fill="hold" nodeType="withEffect">
                                   <p:stCondLst>
-                                    <p:cond delay="600"/>
+                                    <p:cond delay="720"/>
                                   </p:stCondLst>
                                   <p:childTnLst>
                                     <p:set>
@@ -20316,7 +21050,7 @@
                               <p:par>
                                 <p:cTn id="26" presetID="10" presetClass="entr" presetSubtype="0" fill="hold" grpId="0" nodeType="withEffect">
                                   <p:stCondLst>
-                                    <p:cond delay="700"/>
+                                    <p:cond delay="840"/>
                                   </p:stCondLst>
                                   <p:childTnLst>
                                     <p:set>
@@ -20351,7 +21085,7 @@
                               <p:par>
                                 <p:cTn id="29" presetID="10" presetClass="entr" presetSubtype="0" fill="hold" grpId="0" nodeType="withEffect">
                                   <p:stCondLst>
-                                    <p:cond delay="800"/>
+                                    <p:cond delay="960"/>
                                   </p:stCondLst>
                                   <p:childTnLst>
                                     <p:set>
@@ -20384,9 +21118,9 @@
                                 </p:cTn>
                               </p:par>
                               <p:par>
-                                <p:cTn id="32" presetID="10" presetClass="entr" presetSubtype="0" fill="hold" nodeType="withEffect">
-                                  <p:stCondLst>
-                                    <p:cond delay="900"/>
+                                <p:cTn id="32" presetID="10" presetClass="entr" presetSubtype="0" fill="hold" grpId="0" nodeType="withEffect">
+                                  <p:stCondLst>
+                                    <p:cond delay="1080"/>
                                   </p:stCondLst>
                                   <p:childTnLst>
                                     <p:set>
@@ -20419,9 +21153,9 @@
                                 </p:cTn>
                               </p:par>
                               <p:par>
-                                <p:cTn id="35" presetID="10" presetClass="entr" presetSubtype="0" fill="hold" nodeType="withEffect">
-                                  <p:stCondLst>
-                                    <p:cond delay="900"/>
+                                <p:cTn id="35" presetID="10" presetClass="entr" presetSubtype="0" fill="hold" grpId="0" nodeType="withEffect">
+                                  <p:stCondLst>
+                                    <p:cond delay="1080"/>
                                   </p:stCondLst>
                                   <p:childTnLst>
                                     <p:set>
@@ -20456,7 +21190,7 @@
                               <p:par>
                                 <p:cTn id="38" presetID="10" presetClass="entr" presetSubtype="0" fill="hold" nodeType="withEffect">
                                   <p:stCondLst>
-                                    <p:cond delay="900"/>
+                                    <p:cond delay="1080"/>
                                   </p:stCondLst>
                                   <p:childTnLst>
                                     <p:set>
@@ -20491,7 +21225,7 @@
                               <p:par>
                                 <p:cTn id="41" presetID="10" presetClass="entr" presetSubtype="0" fill="hold" grpId="0" nodeType="withEffect">
                                   <p:stCondLst>
-                                    <p:cond delay="900"/>
+                                    <p:cond delay="1080"/>
                                   </p:stCondLst>
                                   <p:childTnLst>
                                     <p:set>
@@ -20526,7 +21260,7 @@
                               <p:par>
                                 <p:cTn id="44" presetID="10" presetClass="entr" presetSubtype="0" fill="hold" grpId="0" nodeType="withEffect">
                                   <p:stCondLst>
-                                    <p:cond delay="900"/>
+                                    <p:cond delay="1080"/>
                                   </p:stCondLst>
                                   <p:childTnLst>
                                     <p:set>
@@ -20590,8 +21324,12 @@
       <p:bldP spid="3" grpId="0" animBg="1"/>
       <p:bldP spid="4" grpId="0" animBg="1"/>
       <p:bldP spid="5" grpId="0" animBg="1"/>
+      <p:bldP spid="6" grpId="0" animBg="1"/>
+      <p:bldP spid="7" grpId="0" animBg="1"/>
       <p:bldP spid="9" grpId="0" animBg="1"/>
       <p:bldP spid="10" grpId="0" animBg="1"/>
+      <p:bldP spid="11" grpId="0" animBg="1"/>
+      <p:bldP spid="12" grpId="0" animBg="1"/>
       <p:bldP spid="14" grpId="0" animBg="1"/>
       <p:bldP spid="15" grpId="0" animBg="1"/>
     </p:bldLst>
